--- a/Lectures/01.Foundations/Lecture03.pptx
+++ b/Lectures/01.Foundations/Lecture03.pptx
@@ -3228,10 +3228,7 @@
                 </a:pPr>
                 <a14:m>
                   <m:oMathPara xmlns:m="http://schemas.openxmlformats.org/officeDocument/2006/math">
-                    <m:oMathParaPr>
-                      <m:jc m:val="centerGroup"/>
-                    </m:oMathParaPr>
-                    <m:oMath xmlns:m="http://schemas.openxmlformats.org/officeDocument/2006/math">
+                    <m:oMath>
                       <m:r>
                         <a:rPr lang="en-US" i="1" smtClean="0">
                           <a:solidFill>
@@ -4267,7 +4264,7 @@
                     <m:d>
                       <m:dPr>
                         <m:ctrlPr>
-                          <a:rPr lang="en-US" i="1">
+                          <a:rPr lang="en-US" b="0" i="1" smtClean="0">
                             <a:solidFill>
                               <a:srgbClr val="0033CC"/>
                             </a:solidFill>
@@ -4327,10 +4324,7 @@
                 </a:pPr>
                 <a14:m>
                   <m:oMathPara xmlns:m="http://schemas.openxmlformats.org/officeDocument/2006/math">
-                    <m:oMathParaPr>
-                      <m:jc m:val="centerGroup"/>
-                    </m:oMathParaPr>
-                    <m:oMath xmlns:m="http://schemas.openxmlformats.org/officeDocument/2006/math">
+                    <m:oMath>
                       <m:r>
                         <a:rPr lang="en-US" b="0" i="1" smtClean="0">
                           <a:latin typeface="Cambria Math" panose="02040503050406030204" pitchFamily="18" charset="0"/>
@@ -5155,10 +5149,7 @@
                 </a:pPr>
                 <a14:m>
                   <m:oMathPara xmlns:m="http://schemas.openxmlformats.org/officeDocument/2006/math">
-                    <m:oMathParaPr>
-                      <m:jc m:val="centerGroup"/>
-                    </m:oMathParaPr>
-                    <m:oMath xmlns:m="http://schemas.openxmlformats.org/officeDocument/2006/math">
+                    <m:oMath>
                       <m:r>
                         <a:rPr lang="en-US" i="1">
                           <a:latin typeface="Cambria Math" panose="02040503050406030204" pitchFamily="18" charset="0"/>
@@ -5199,7 +5190,10 @@
                       <m:f>
                         <m:fPr>
                           <m:ctrlPr>
-                            <a:rPr lang="en-US" i="1">
+                            <a:rPr lang="en-US" b="0" i="1" smtClean="0">
+                              <a:solidFill>
+                                <a:srgbClr val="0033CC"/>
+                              </a:solidFill>
                               <a:latin typeface="Cambria Math" panose="02040503050406030204" pitchFamily="18" charset="0"/>
                             </a:rPr>
                           </m:ctrlPr>
@@ -5517,10 +5511,7 @@
                 </a:br>
                 <a14:m>
                   <m:oMathPara xmlns:m="http://schemas.openxmlformats.org/officeDocument/2006/math">
-                    <m:oMathParaPr>
-                      <m:jc m:val="centerGroup"/>
-                    </m:oMathParaPr>
-                    <m:oMath xmlns:m="http://schemas.openxmlformats.org/officeDocument/2006/math">
+                    <m:oMath>
                       <m:r>
                         <a:rPr lang="en-US" b="0" i="1" smtClean="0">
                           <a:latin typeface="Cambria Math" panose="02040503050406030204" pitchFamily="18" charset="0"/>
@@ -5561,7 +5552,10 @@
                       <m:f>
                         <m:fPr>
                           <m:ctrlPr>
-                            <a:rPr lang="en-US" i="1">
+                            <a:rPr lang="en-US" b="0" i="1" smtClean="0">
+                              <a:solidFill>
+                                <a:srgbClr val="0033CC"/>
+                              </a:solidFill>
                               <a:latin typeface="Cambria Math" panose="02040503050406030204" pitchFamily="18" charset="0"/>
                             </a:rPr>
                           </m:ctrlPr>
@@ -5682,7 +5676,7 @@
                               <m:begChr m:val="["/>
                               <m:endChr m:val="]"/>
                               <m:ctrlPr>
-                                <a:rPr lang="en-US" i="1" smtClean="0">
+                                <a:rPr lang="en-US" b="0" i="1" smtClean="0">
                                   <a:latin typeface="Cambria Math" panose="02040503050406030204" pitchFamily="18" charset="0"/>
                                 </a:rPr>
                               </m:ctrlPr>
@@ -6361,7 +6355,7 @@
                         <m:chr m:val="∑"/>
                         <m:supHide m:val="on"/>
                         <m:ctrlPr>
-                          <a:rPr lang="en-US" i="1">
+                          <a:rPr lang="en-US" b="0" i="1" smtClean="0">
                             <a:latin typeface="Cambria Math" panose="02040503050406030204" pitchFamily="18" charset="0"/>
                           </a:rPr>
                         </m:ctrlPr>
@@ -6723,7 +6717,7 @@
                         <m:chr m:val="∑"/>
                         <m:supHide m:val="on"/>
                         <m:ctrlPr>
-                          <a:rPr lang="en-US" i="1">
+                          <a:rPr lang="en-US" b="0" i="1" smtClean="0">
                             <a:latin typeface="Cambria Math" panose="02040503050406030204" pitchFamily="18" charset="0"/>
                           </a:rPr>
                         </m:ctrlPr>
@@ -6739,18 +6733,12 @@
                           <a:rPr lang="en-US" b="0" i="1" smtClean="0">
                             <a:latin typeface="Cambria Math" panose="02040503050406030204" pitchFamily="18" charset="0"/>
                           </a:rPr>
-                          <m:t>, </m:t>
-                        </m:r>
-                        <m:r>
-                          <a:rPr lang="en-US" b="1" i="1" smtClean="0">
-                            <a:latin typeface="Cambria Math" panose="02040503050406030204" pitchFamily="18" charset="0"/>
-                          </a:rPr>
-                          <m:t> </m:t>
+                          <m:t>,  </m:t>
                         </m:r>
                         <m:sSub>
                           <m:sSubPr>
                             <m:ctrlPr>
-                              <a:rPr lang="en-US" b="1" i="1" smtClean="0">
+                              <a:rPr lang="en-US" b="1" i="1">
                                 <a:solidFill>
                                   <a:srgbClr val="C00000"/>
                                 </a:solidFill>
@@ -6906,7 +6894,10 @@
                         <m:chr m:val="∑"/>
                         <m:supHide m:val="on"/>
                         <m:ctrlPr>
-                          <a:rPr lang="en-US" i="1">
+                          <a:rPr lang="en-US" b="1" i="1" smtClean="0">
+                            <a:solidFill>
+                              <a:srgbClr val="C00000"/>
+                            </a:solidFill>
                             <a:latin typeface="Cambria Math" panose="02040503050406030204" pitchFamily="18" charset="0"/>
                           </a:rPr>
                         </m:ctrlPr>
@@ -6917,7 +6908,7 @@
                             <m:ctrlPr>
                               <a:rPr lang="en-US" b="1" i="1" smtClean="0">
                                 <a:solidFill>
-                                  <a:srgbClr val="C00000"/>
+                                  <a:schemeClr val="tx1"/>
                                 </a:solidFill>
                                 <a:latin typeface="Cambria Math" panose="02040503050406030204" pitchFamily="18" charset="0"/>
                               </a:rPr>
@@ -7647,7 +7638,7 @@
                         <m:chr m:val="∑"/>
                         <m:supHide m:val="on"/>
                         <m:ctrlPr>
-                          <a:rPr lang="en-US" i="1">
+                          <a:rPr lang="en-US" b="0" i="1" smtClean="0">
                             <a:latin typeface="Cambria Math" panose="02040503050406030204" pitchFamily="18" charset="0"/>
                           </a:rPr>
                         </m:ctrlPr>
@@ -8100,7 +8091,7 @@
                         <m:chr m:val="∑"/>
                         <m:supHide m:val="on"/>
                         <m:ctrlPr>
-                          <a:rPr lang="en-US" i="1">
+                          <a:rPr lang="en-US" b="0" i="1" smtClean="0">
                             <a:latin typeface="Cambria Math" panose="02040503050406030204" pitchFamily="18" charset="0"/>
                           </a:rPr>
                         </m:ctrlPr>
@@ -8261,7 +8252,7 @@
                         <m:chr m:val="∑"/>
                         <m:supHide m:val="on"/>
                         <m:ctrlPr>
-                          <a:rPr lang="en-US" i="1">
+                          <a:rPr lang="en-US" b="0" i="1" smtClean="0">
                             <a:latin typeface="Cambria Math" panose="02040503050406030204" pitchFamily="18" charset="0"/>
                           </a:rPr>
                         </m:ctrlPr>
@@ -8664,7 +8655,7 @@
                         <m:chr m:val="∑"/>
                         <m:supHide m:val="on"/>
                         <m:ctrlPr>
-                          <a:rPr lang="en-US" i="1">
+                          <a:rPr lang="en-US" b="0" i="1" smtClean="0">
                             <a:latin typeface="Cambria Math" panose="02040503050406030204" pitchFamily="18" charset="0"/>
                           </a:rPr>
                         </m:ctrlPr>
@@ -9078,7 +9069,7 @@
                         <m:sSub>
                           <m:sSubPr>
                             <m:ctrlPr>
-                              <a:rPr lang="en-US" i="1">
+                              <a:rPr lang="en-US" b="0" i="1" smtClean="0">
                                 <a:latin typeface="Cambria Math" panose="02040503050406030204" pitchFamily="18" charset="0"/>
                               </a:rPr>
                             </m:ctrlPr>
@@ -9239,7 +9230,7 @@
                         <m:sSub>
                           <m:sSubPr>
                             <m:ctrlPr>
-                              <a:rPr lang="en-US" i="1">
+                              <a:rPr lang="en-US" b="0" i="1" smtClean="0">
                                 <a:latin typeface="Cambria Math" panose="02040503050406030204" pitchFamily="18" charset="0"/>
                               </a:rPr>
                             </m:ctrlPr>
@@ -10419,10 +10410,7 @@
                 </a:pPr>
                 <a14:m>
                   <m:oMathPara xmlns:m="http://schemas.openxmlformats.org/officeDocument/2006/math">
-                    <m:oMathParaPr>
-                      <m:jc m:val="centerGroup"/>
-                    </m:oMathParaPr>
-                    <m:oMath xmlns:m="http://schemas.openxmlformats.org/officeDocument/2006/math">
+                    <m:oMath>
                       <m:r>
                         <a:rPr lang="en-US" b="0" i="1" smtClean="0">
                           <a:latin typeface="Cambria Math" panose="02040503050406030204" pitchFamily="18" charset="0"/>
@@ -10833,8 +10821,8 @@
           </a:p>
         </p:txBody>
       </p:sp>
-      <mc:AlternateContent xmlns:mc="http://schemas.openxmlformats.org/markup-compatibility/2006" xmlns:a14="http://schemas.microsoft.com/office/drawing/2010/main">
-        <mc:Choice Requires="a14">
+      <mc:AlternateContent xmlns:mc="http://schemas.openxmlformats.org/markup-compatibility/2006">
+        <mc:Choice xmlns:a14="http://schemas.microsoft.com/office/drawing/2010/main" Requires="a14">
           <p:sp>
             <p:nvSpPr>
               <p:cNvPr id="8" name="Content Placeholder 7">
@@ -10863,18 +10851,22 @@
                   <a:rPr lang="en-US" dirty="0">
                     <a:latin typeface="+mn-lt"/>
                   </a:rPr>
-                  <a:t>The ROC curve is a plot of </a:t>
-                </a:r>
-                <a:br>
+                  <a:t>The Receiver Operating Characteristic (</a:t>
+                </a:r>
+                <a:r>
+                  <a:rPr lang="en-US" dirty="0">
+                    <a:solidFill>
+                      <a:srgbClr val="0033CC"/>
+                    </a:solidFill>
+                    <a:latin typeface="+mn-lt"/>
+                  </a:rPr>
+                  <a:t>ROC)</a:t>
+                </a:r>
+                <a:r>
                   <a:rPr lang="en-US" dirty="0">
                     <a:latin typeface="+mn-lt"/>
                   </a:rPr>
-                </a:br>
-                <a:r>
-                  <a:rPr lang="en-US" dirty="0">
-                    <a:latin typeface="+mn-lt"/>
-                  </a:rPr>
-                  <a:t>TPR vs. FPR, that is,</a:t>
+                  <a:t> curve is a plot of TPR vs. FPR, that is,</a:t>
                 </a:r>
                 <a:br>
                   <a:rPr lang="en-US" dirty="0">
@@ -10894,7 +10886,7 @@
                     <m:oMathParaPr>
                       <m:jc m:val="left"/>
                     </m:oMathParaPr>
-                    <m:oMath xmlns:m="http://schemas.openxmlformats.org/officeDocument/2006/math">
+                    <m:oMath>
                       <m:r>
                         <a:rPr lang="en-US" b="0" i="1" smtClean="0">
                           <a:solidFill>
@@ -10975,19 +10967,7 @@
                           </a:solidFill>
                           <a:latin typeface="Cambria Math" panose="02040503050406030204" pitchFamily="18" charset="0"/>
                         </a:rPr>
-                        <m:t>vs</m:t>
-                      </m:r>
-                      <m:r>
-                        <m:rPr>
-                          <m:nor/>
-                        </m:rPr>
-                        <a:rPr lang="en-US" b="0" i="0" smtClean="0">
-                          <a:solidFill>
-                            <a:srgbClr val="0033CC"/>
-                          </a:solidFill>
-                          <a:latin typeface="Cambria Math" panose="02040503050406030204" pitchFamily="18" charset="0"/>
-                        </a:rPr>
-                        <m:t>.</m:t>
+                        <m:t>vs.</m:t>
                       </m:r>
                       <m:r>
                         <a:rPr lang="en-US" b="0" i="1" smtClean="0">
@@ -11078,16 +11058,38 @@
                   <a:rPr lang="en-US" dirty="0">
                     <a:latin typeface="+mn-lt"/>
                   </a:rPr>
-                  <a:t>where (usually)</a:t>
+                  <a:t>for different </a:t>
+                </a:r>
+                <a14:m>
+                  <m:oMath xmlns:m="http://schemas.openxmlformats.org/officeDocument/2006/math">
+                    <m:r>
+                      <a:rPr lang="en-US" i="1">
+                        <a:solidFill>
+                          <a:srgbClr val="0033CC"/>
+                        </a:solidFill>
+                        <a:latin typeface="Cambria Math" panose="02040503050406030204" pitchFamily="18" charset="0"/>
+                      </a:rPr>
+                      <m:t>𝑡</m:t>
+                    </m:r>
+                  </m:oMath>
+                </a14:m>
+                <a:r>
+                  <a:rPr lang="en-US" dirty="0">
+                    <a:latin typeface="+mn-lt"/>
+                  </a:rPr>
+                  <a:t>, where </a:t>
                 </a:r>
               </a:p>
               <a:p>
                 <a:pPr marL="0" indent="0">
                   <a:buNone/>
                 </a:pPr>
-                <a:endParaRPr lang="en-US" dirty="0">
-                  <a:latin typeface="+mn-lt"/>
-                </a:endParaRPr>
+                <a:r>
+                  <a:rPr lang="en-US" dirty="0">
+                    <a:latin typeface="+mn-lt"/>
+                  </a:rPr>
+                  <a:t>(usually)</a:t>
+                </a:r>
               </a:p>
               <a:p>
                 <a:pPr marL="0" indent="0">
@@ -11098,7 +11100,7 @@
                     <m:oMathParaPr>
                       <m:jc m:val="left"/>
                     </m:oMathParaPr>
-                    <m:oMath xmlns:m="http://schemas.openxmlformats.org/officeDocument/2006/math">
+                    <m:oMath>
                       <m:r>
                         <a:rPr lang="en-US" b="0" i="1" smtClean="0">
                           <a:solidFill>
@@ -11108,15 +11110,29 @@
                         </a:rPr>
                         <m:t>𝐷</m:t>
                       </m:r>
-                      <m:r>
-                        <a:rPr lang="en-US" b="0" i="1" smtClean="0">
-                          <a:solidFill>
-                            <a:schemeClr val="tx1"/>
-                          </a:solidFill>
-                          <a:latin typeface="Cambria Math" panose="02040503050406030204" pitchFamily="18" charset="0"/>
-                        </a:rPr>
-                        <m:t>(</m:t>
-                      </m:r>
+                      <m:d>
+                        <m:dPr>
+                          <m:ctrlPr>
+                            <a:rPr lang="en-US" i="1">
+                              <a:solidFill>
+                                <a:schemeClr val="tx1"/>
+                              </a:solidFill>
+                              <a:latin typeface="Cambria Math" panose="02040503050406030204" pitchFamily="18" charset="0"/>
+                            </a:rPr>
+                          </m:ctrlPr>
+                        </m:dPr>
+                        <m:e>
+                          <m:r>
+                            <a:rPr lang="en-US" i="1">
+                              <a:solidFill>
+                                <a:schemeClr val="tx1"/>
+                              </a:solidFill>
+                              <a:latin typeface="Cambria Math" panose="02040503050406030204" pitchFamily="18" charset="0"/>
+                            </a:rPr>
+                            <m:t>𝑥</m:t>
+                          </m:r>
+                        </m:e>
+                      </m:d>
                       <m:r>
                         <a:rPr lang="en-US" i="1">
                           <a:solidFill>
@@ -11124,21 +11140,12 @@
                           </a:solidFill>
                           <a:latin typeface="Cambria Math" panose="02040503050406030204" pitchFamily="18" charset="0"/>
                         </a:rPr>
-                        <m:t>𝑥</m:t>
-                      </m:r>
-                      <m:r>
-                        <a:rPr lang="en-US" i="1">
-                          <a:solidFill>
-                            <a:schemeClr val="tx1"/>
-                          </a:solidFill>
-                          <a:latin typeface="Cambria Math" panose="02040503050406030204" pitchFamily="18" charset="0"/>
-                        </a:rPr>
-                        <m:t>)=</m:t>
+                        <m:t>=</m:t>
                       </m:r>
                       <m:f>
                         <m:fPr>
                           <m:ctrlPr>
-                            <a:rPr lang="en-US" i="1">
+                            <a:rPr lang="en-US" i="1" smtClean="0">
                               <a:solidFill>
                                 <a:schemeClr val="tx1"/>
                               </a:solidFill>
@@ -11178,7 +11185,7 @@
                             <m:dPr>
                               <m:begChr m:val="|"/>
                               <m:ctrlPr>
-                                <a:rPr lang="en-US" i="1">
+                                <a:rPr lang="en-US" b="0" i="1" smtClean="0">
                                   <a:solidFill>
                                     <a:schemeClr val="tx1"/>
                                   </a:solidFill>
@@ -11325,6 +11332,42 @@
                     </m:oMath>
                   </m:oMathPara>
                 </a14:m>
+                <a:br>
+                  <a:rPr lang="en-US" b="0" dirty="0">
+                    <a:latin typeface="+mn-lt"/>
+                  </a:rPr>
+                </a:br>
+                <a:endParaRPr lang="en-US" b="0" dirty="0">
+                  <a:latin typeface="+mn-lt"/>
+                </a:endParaRPr>
+              </a:p>
+              <a:p>
+                <a:pPr marL="0" indent="0">
+                  <a:buNone/>
+                </a:pPr>
+                <a:endParaRPr lang="en-US" dirty="0">
+                  <a:latin typeface="+mn-lt"/>
+                </a:endParaRPr>
+              </a:p>
+              <a:p>
+                <a:pPr marL="0" indent="0">
+                  <a:buNone/>
+                </a:pPr>
+                <a:r>
+                  <a:rPr lang="en-US" dirty="0">
+                    <a:solidFill>
+                      <a:srgbClr val="0033CC"/>
+                    </a:solidFill>
+                    <a:latin typeface="+mn-lt"/>
+                  </a:rPr>
+                  <a:t>AUC</a:t>
+                </a:r>
+                <a:r>
+                  <a:rPr lang="en-US" dirty="0">
+                    <a:latin typeface="+mn-lt"/>
+                  </a:rPr>
+                  <a:t>: Area Under Curve</a:t>
+                </a:r>
                 <a:endParaRPr lang="en-US" b="0" dirty="0">
                   <a:latin typeface="+mn-lt"/>
                 </a:endParaRPr>
@@ -11340,7 +11383,7 @@
             </p:txBody>
           </p:sp>
         </mc:Choice>
-        <mc:Fallback xmlns="">
+        <mc:Fallback>
           <p:sp>
             <p:nvSpPr>
               <p:cNvPr id="8" name="Content Placeholder 7">
@@ -11402,7 +11445,7 @@
         </p:blipFill>
         <p:spPr>
           <a:xfrm>
-            <a:off x="4267200" y="1447800"/>
+            <a:off x="4329165" y="1905000"/>
             <a:ext cx="4662435" cy="4419600"/>
           </a:xfrm>
           <a:prstGeom prst="rect">
@@ -11532,8 +11575,8 @@
           <a:chExt cx="0" cy="0"/>
         </a:xfrm>
       </p:grpSpPr>
-      <mc:AlternateContent xmlns:mc="http://schemas.openxmlformats.org/markup-compatibility/2006" xmlns:a14="http://schemas.microsoft.com/office/drawing/2010/main">
-        <mc:Choice Requires="a14">
+      <mc:AlternateContent xmlns:mc="http://schemas.openxmlformats.org/markup-compatibility/2006">
+        <mc:Choice xmlns:a14="http://schemas.microsoft.com/office/drawing/2010/main" Requires="a14">
           <p:sp>
             <p:nvSpPr>
               <p:cNvPr id="4" name="Content Placeholder 3">
@@ -11569,10 +11612,7 @@
                 </a:pPr>
                 <a14:m>
                   <m:oMathPara xmlns:m="http://schemas.openxmlformats.org/officeDocument/2006/math">
-                    <m:oMathParaPr>
-                      <m:jc m:val="centerGroup"/>
-                    </m:oMathParaPr>
-                    <m:oMath xmlns:m="http://schemas.openxmlformats.org/officeDocument/2006/math">
+                    <m:oMath>
                       <m:r>
                         <a:rPr lang="en-US" b="0" i="1" smtClean="0">
                           <a:latin typeface="Cambria Math" panose="02040503050406030204" pitchFamily="18" charset="0"/>
@@ -11752,10 +11792,7 @@
                 </a:pPr>
                 <a14:m>
                   <m:oMathPara xmlns:m="http://schemas.openxmlformats.org/officeDocument/2006/math">
-                    <m:oMathParaPr>
-                      <m:jc m:val="centerGroup"/>
-                    </m:oMathParaPr>
-                    <m:oMath xmlns:m="http://schemas.openxmlformats.org/officeDocument/2006/math">
+                    <m:oMath>
                       <m:r>
                         <a:rPr lang="en-US" b="0" i="1" smtClean="0">
                           <a:latin typeface="Cambria Math" panose="02040503050406030204" pitchFamily="18" charset="0"/>
@@ -11786,6 +11823,9 @@
                           <m:endChr m:val="]"/>
                           <m:ctrlPr>
                             <a:rPr lang="en-US" b="0" i="1" smtClean="0">
+                              <a:solidFill>
+                                <a:srgbClr val="0033CC"/>
+                              </a:solidFill>
                               <a:latin typeface="Cambria Math" panose="02040503050406030204" pitchFamily="18" charset="0"/>
                             </a:rPr>
                           </m:ctrlPr>
@@ -11937,7 +11977,30 @@
                       </a:outerShdw>
                     </a:effectLst>
                   </a:rPr>
-                  <a:t>The above is often referred to as the likelihood ratio trick. </a:t>
+                  <a:t>The above is often referred to as the </a:t>
+                </a:r>
+                <a:r>
+                  <a:rPr lang="en-US" b="1" dirty="0">
+                    <a:solidFill>
+                      <a:srgbClr val="0033CC"/>
+                    </a:solidFill>
+                    <a:effectLst>
+                      <a:outerShdw blurRad="38100" dist="38100" dir="2700000" algn="tl">
+                        <a:srgbClr val="DDDDDD"/>
+                      </a:outerShdw>
+                    </a:effectLst>
+                  </a:rPr>
+                  <a:t>likelihood ratio trick</a:t>
+                </a:r>
+                <a:r>
+                  <a:rPr lang="en-US" dirty="0">
+                    <a:effectLst>
+                      <a:outerShdw blurRad="38100" dist="38100" dir="2700000" algn="tl">
+                        <a:srgbClr val="DDDDDD"/>
+                      </a:outerShdw>
+                    </a:effectLst>
+                  </a:rPr>
+                  <a:t>. </a:t>
                 </a:r>
               </a:p>
               <a:p>
@@ -12136,7 +12199,7 @@
             </p:txBody>
           </p:sp>
         </mc:Choice>
-        <mc:Fallback xmlns="">
+        <mc:Fallback>
           <p:sp>
             <p:nvSpPr>
               <p:cNvPr id="4" name="Content Placeholder 3">
@@ -12882,10 +12945,7 @@
                 </a:pPr>
                 <a14:m>
                   <m:oMathPara xmlns:m="http://schemas.openxmlformats.org/officeDocument/2006/math">
-                    <m:oMathParaPr>
-                      <m:jc m:val="centerGroup"/>
-                    </m:oMathParaPr>
-                    <m:oMath xmlns:m="http://schemas.openxmlformats.org/officeDocument/2006/math">
+                    <m:oMath>
                       <m:r>
                         <a:rPr lang="en-US" b="0" i="1" smtClean="0">
                           <a:latin typeface="Cambria Math" panose="02040503050406030204" pitchFamily="18" charset="0"/>
@@ -12939,7 +12999,7 @@
                           <m:begChr m:val="["/>
                           <m:endChr m:val="]"/>
                           <m:ctrlPr>
-                            <a:rPr lang="en-US" b="0" i="1" smtClean="0">
+                            <a:rPr lang="en-US" i="1">
                               <a:latin typeface="Cambria Math" panose="02040503050406030204" pitchFamily="18" charset="0"/>
                             </a:rPr>
                           </m:ctrlPr>
@@ -13511,8 +13571,8 @@
           </a:p>
         </p:txBody>
       </p:sp>
-      <mc:AlternateContent xmlns:mc="http://schemas.openxmlformats.org/markup-compatibility/2006" xmlns:a14="http://schemas.microsoft.com/office/drawing/2010/main">
-        <mc:Choice Requires="a14">
+      <mc:AlternateContent xmlns:mc="http://schemas.openxmlformats.org/markup-compatibility/2006">
+        <mc:Choice xmlns:a14="http://schemas.microsoft.com/office/drawing/2010/main" Requires="a14">
           <p:sp>
             <p:nvSpPr>
               <p:cNvPr id="8" name="Content Placeholder 7">
@@ -13539,22 +13599,7 @@
                 </a:pPr>
                 <a:r>
                   <a:rPr lang="en-US" dirty="0"/>
-                  <a:t>But we can go further*. </a:t>
-                </a:r>
-              </a:p>
-              <a:p>
-                <a:pPr marL="0" indent="0">
-                  <a:buNone/>
-                </a:pPr>
-                <a:endParaRPr lang="en-US" dirty="0"/>
-              </a:p>
-              <a:p>
-                <a:pPr marL="0" indent="0">
-                  <a:buNone/>
-                </a:pPr>
-                <a:r>
-                  <a:rPr lang="en-US" dirty="0"/>
-                  <a:t>Suppose our dataset U of sample size </a:t>
+                  <a:t>But we can go further*. Suppose our dataset U of sample size </a:t>
                 </a:r>
                 <a:r>
                   <a:rPr lang="en-US" i="1" dirty="0">
@@ -13809,7 +13854,7 @@
                         <m:begChr m:val="{"/>
                         <m:endChr m:val="}"/>
                         <m:ctrlPr>
-                          <a:rPr lang="en-US" i="1" smtClean="0">
+                          <a:rPr lang="en-US" b="0" i="1" smtClean="0">
                             <a:solidFill>
                               <a:srgbClr val="0033CC"/>
                             </a:solidFill>
@@ -13955,7 +14000,7 @@
             </p:txBody>
           </p:sp>
         </mc:Choice>
-        <mc:Fallback xmlns="">
+        <mc:Fallback>
           <p:sp>
             <p:nvSpPr>
               <p:cNvPr id="8" name="Content Placeholder 7">
@@ -13976,7 +14021,7 @@
               <a:blipFill>
                 <a:blip r:embed="rId2"/>
                 <a:stretch>
-                  <a:fillRect l="-1305" t="-1316" r="-1631" b="-5263"/>
+                  <a:fillRect l="-1305" t="-1316" r="-1631"/>
                 </a:stretch>
               </a:blipFill>
             </p:spPr>
@@ -14009,8 +14054,8 @@
         </p:nvSpPr>
         <p:spPr>
           <a:xfrm>
-            <a:off x="3352800" y="5831740"/>
-            <a:ext cx="4837671" cy="830997"/>
+            <a:off x="660400" y="5598486"/>
+            <a:ext cx="8331200" cy="646331"/>
           </a:xfrm>
           <a:prstGeom prst="rect">
             <a:avLst/>
@@ -14018,61 +14063,59 @@
           <a:noFill/>
         </p:spPr>
         <p:txBody>
-          <a:bodyPr wrap="none" rtlCol="0">
+          <a:bodyPr wrap="square" rtlCol="0">
             <a:spAutoFit/>
           </a:bodyPr>
           <a:lstStyle/>
           <a:p>
             <a:r>
-              <a:rPr lang="en-US" sz="1600" dirty="0"/>
+              <a:rPr lang="en-US" sz="1800" dirty="0"/>
               <a:t>* </a:t>
             </a:r>
             <a:r>
-              <a:rPr lang="en-US" sz="1600" dirty="0" err="1"/>
+              <a:rPr lang="en-US" sz="1800" dirty="0" err="1"/>
               <a:t>Baldi</a:t>
             </a:r>
             <a:r>
-              <a:rPr lang="en-US" sz="1600" dirty="0"/>
+              <a:rPr lang="en-US" sz="1800" dirty="0"/>
               <a:t>, P., Cranmer, K., </a:t>
             </a:r>
             <a:r>
-              <a:rPr lang="en-US" sz="1600" dirty="0" err="1"/>
+              <a:rPr lang="en-US" sz="1800" dirty="0" err="1"/>
               <a:t>Faucett</a:t>
             </a:r>
             <a:r>
-              <a:rPr lang="en-US" sz="1600" dirty="0"/>
+              <a:rPr lang="en-US" sz="1800" dirty="0"/>
               <a:t>, T. </a:t>
             </a:r>
             <a:r>
-              <a:rPr lang="en-US" sz="1600" i="1" dirty="0"/>
+              <a:rPr lang="en-US" sz="1800" i="1" dirty="0"/>
               <a:t>et al.</a:t>
             </a:r>
             <a:r>
-              <a:rPr lang="en-US" sz="1600" dirty="0"/>
+              <a:rPr lang="en-US" sz="1800" dirty="0"/>
               <a:t> </a:t>
             </a:r>
           </a:p>
           <a:p>
             <a:r>
-              <a:rPr lang="en-US" sz="1600" dirty="0"/>
-              <a:t>Parameterized neural networks for high-energy physics. </a:t>
+              <a:rPr lang="en-US" sz="1800" dirty="0"/>
+              <a:t>Parameterized neural networks for high-energy physics.  </a:t>
             </a:r>
-          </a:p>
-          <a:p>
             <a:r>
-              <a:rPr lang="en-US" sz="1600" i="1" dirty="0"/>
+              <a:rPr lang="en-US" sz="1800" i="1" dirty="0"/>
               <a:t>Eur. Phys. J. C</a:t>
             </a:r>
             <a:r>
-              <a:rPr lang="en-US" sz="1600" dirty="0"/>
+              <a:rPr lang="en-US" sz="1800" dirty="0"/>
               <a:t> </a:t>
             </a:r>
             <a:r>
-              <a:rPr lang="en-US" sz="1600" b="1" dirty="0"/>
+              <a:rPr lang="en-US" sz="1800" b="1" dirty="0"/>
               <a:t>76</a:t>
             </a:r>
             <a:r>
-              <a:rPr lang="en-US" sz="1600" dirty="0"/>
+              <a:rPr lang="en-US" sz="1800" dirty="0"/>
               <a:t>, 235 (2016). </a:t>
             </a:r>
           </a:p>
@@ -14230,67 +14273,6 @@
                       </p:childTnLst>
                     </p:cTn>
                   </p:par>
-                  <p:par>
-                    <p:cTn id="13" fill="hold">
-                      <p:stCondLst>
-                        <p:cond delay="indefinite"/>
-                      </p:stCondLst>
-                      <p:childTnLst>
-                        <p:par>
-                          <p:cTn id="14" fill="hold">
-                            <p:stCondLst>
-                              <p:cond delay="0"/>
-                            </p:stCondLst>
-                            <p:childTnLst>
-                              <p:par>
-                                <p:cTn id="15" presetID="10" presetClass="entr" presetSubtype="0" fill="hold" nodeType="clickEffect">
-                                  <p:stCondLst>
-                                    <p:cond delay="0"/>
-                                  </p:stCondLst>
-                                  <p:childTnLst>
-                                    <p:set>
-                                      <p:cBhvr>
-                                        <p:cTn id="16" dur="1" fill="hold">
-                                          <p:stCondLst>
-                                            <p:cond delay="0"/>
-                                          </p:stCondLst>
-                                        </p:cTn>
-                                        <p:tgtEl>
-                                          <p:spTgt spid="8">
-                                            <p:txEl>
-                                              <p:pRg st="6" end="6"/>
-                                            </p:txEl>
-                                          </p:spTgt>
-                                        </p:tgtEl>
-                                        <p:attrNameLst>
-                                          <p:attrName>style.visibility</p:attrName>
-                                        </p:attrNameLst>
-                                      </p:cBhvr>
-                                      <p:to>
-                                        <p:strVal val="visible"/>
-                                      </p:to>
-                                    </p:set>
-                                    <p:animEffect transition="in" filter="fade">
-                                      <p:cBhvr>
-                                        <p:cTn id="17" dur="500"/>
-                                        <p:tgtEl>
-                                          <p:spTgt spid="8">
-                                            <p:txEl>
-                                              <p:pRg st="6" end="6"/>
-                                            </p:txEl>
-                                          </p:spTgt>
-                                        </p:tgtEl>
-                                      </p:cBhvr>
-                                    </p:animEffect>
-                                  </p:childTnLst>
-                                </p:cTn>
-                              </p:par>
-                            </p:childTnLst>
-                          </p:cTn>
-                        </p:par>
-                      </p:childTnLst>
-                    </p:cTn>
-                  </p:par>
                 </p:childTnLst>
               </p:cTn>
               <p:prevCondLst>
@@ -14977,7 +14959,7 @@
                         <m:begChr m:val="["/>
                         <m:endChr m:val="]"/>
                         <m:ctrlPr>
-                          <a:rPr lang="en-US" b="0" i="1" smtClean="0">
+                          <a:rPr lang="en-US" i="1">
                             <a:latin typeface="Cambria Math" panose="02040503050406030204" pitchFamily="18" charset="0"/>
                           </a:rPr>
                         </m:ctrlPr>
@@ -15137,10 +15119,7 @@
                 </a:pPr>
                 <a14:m>
                   <m:oMathPara xmlns:m="http://schemas.openxmlformats.org/officeDocument/2006/math">
-                    <m:oMathParaPr>
-                      <m:jc m:val="centerGroup"/>
-                    </m:oMathParaPr>
-                    <m:oMath xmlns:m="http://schemas.openxmlformats.org/officeDocument/2006/math">
+                    <m:oMath>
                       <m:r>
                         <a:rPr lang="en-US" b="0" i="1" smtClean="0">
                           <a:latin typeface="Cambria Math" panose="02040503050406030204" pitchFamily="18" charset="0"/>
@@ -15236,7 +15215,7 @@
                           <m:begChr m:val="["/>
                           <m:endChr m:val="]"/>
                           <m:ctrlPr>
-                            <a:rPr lang="en-US" b="0" i="1" smtClean="0">
+                            <a:rPr lang="en-US" i="1">
                               <a:latin typeface="Cambria Math" panose="02040503050406030204" pitchFamily="18" charset="0"/>
                             </a:rPr>
                           </m:ctrlPr>
@@ -15728,8 +15707,8 @@
           </a:p>
         </p:txBody>
       </p:sp>
-      <mc:AlternateContent xmlns:mc="http://schemas.openxmlformats.org/markup-compatibility/2006" xmlns:a14="http://schemas.microsoft.com/office/drawing/2010/main">
-        <mc:Choice Requires="a14">
+      <mc:AlternateContent xmlns:mc="http://schemas.openxmlformats.org/markup-compatibility/2006">
+        <mc:Choice xmlns:a14="http://schemas.microsoft.com/office/drawing/2010/main" Requires="a14">
           <p:sp>
             <p:nvSpPr>
               <p:cNvPr id="8" name="Content Placeholder 7">
@@ -15773,10 +15752,7 @@
                 </a:pPr>
                 <a14:m>
                   <m:oMathPara xmlns:m="http://schemas.openxmlformats.org/officeDocument/2006/math">
-                    <m:oMathParaPr>
-                      <m:jc m:val="centerGroup"/>
-                    </m:oMathParaPr>
-                    <m:oMath xmlns:m="http://schemas.openxmlformats.org/officeDocument/2006/math">
+                    <m:oMath>
                       <m:f>
                         <m:fPr>
                           <m:ctrlPr>
@@ -15953,10 +15929,7 @@
                 </a:pPr>
                 <a14:m>
                   <m:oMathPara xmlns:m="http://schemas.openxmlformats.org/officeDocument/2006/math">
-                    <m:oMathParaPr>
-                      <m:jc m:val="centerGroup"/>
-                    </m:oMathParaPr>
-                    <m:oMath xmlns:m="http://schemas.openxmlformats.org/officeDocument/2006/math">
+                    <m:oMath>
                       <m:r>
                         <a:rPr lang="en-US" b="0" i="1" smtClean="0">
                           <a:latin typeface="Cambria Math" panose="02040503050406030204" pitchFamily="18" charset="0"/>
@@ -16001,7 +15974,7 @@
                       <m:func>
                         <m:funcPr>
                           <m:ctrlPr>
-                            <a:rPr lang="en-US" b="0" i="1" smtClean="0">
+                            <a:rPr lang="en-US" b="0" i="0" smtClean="0">
                               <a:latin typeface="Cambria Math" panose="02040503050406030204" pitchFamily="18" charset="0"/>
                             </a:rPr>
                           </m:ctrlPr>
@@ -16145,14 +16118,11 @@
                 </a:pPr>
                 <a14:m>
                   <m:oMathPara xmlns:m="http://schemas.openxmlformats.org/officeDocument/2006/math">
-                    <m:oMathParaPr>
-                      <m:jc m:val="centerGroup"/>
-                    </m:oMathParaPr>
-                    <m:oMath xmlns:m="http://schemas.openxmlformats.org/officeDocument/2006/math">
+                    <m:oMath>
                       <m:func>
                         <m:funcPr>
                           <m:ctrlPr>
-                            <a:rPr lang="en-US" b="0" i="1" smtClean="0">
+                            <a:rPr lang="en-US" b="0" i="0" smtClean="0">
                               <a:solidFill>
                                 <a:schemeClr val="tx1"/>
                               </a:solidFill>
@@ -16242,7 +16212,7 @@
                       <m:func>
                         <m:funcPr>
                           <m:ctrlPr>
-                            <a:rPr lang="en-US" b="0" i="1" smtClean="0">
+                            <a:rPr lang="en-US" b="0" i="0" smtClean="0">
                               <a:solidFill>
                                 <a:schemeClr val="tx1"/>
                               </a:solidFill>
@@ -16295,8 +16265,26 @@
                                 </a:rPr>
                                 <m:t>𝑥</m:t>
                               </m:r>
+                              <m:r>
+                                <a:rPr lang="en-US" b="0" i="1" smtClean="0">
+                                  <a:solidFill>
+                                    <a:schemeClr val="tx1"/>
+                                  </a:solidFill>
+                                  <a:latin typeface="Cambria Math" panose="02040503050406030204" pitchFamily="18" charset="0"/>
+                                </a:rPr>
+                                <m:t> </m:t>
+                              </m:r>
                             </m:e>
                             <m:e>
+                              <m:r>
+                                <a:rPr lang="en-US" b="0" i="1" smtClean="0">
+                                  <a:solidFill>
+                                    <a:schemeClr val="tx1"/>
+                                  </a:solidFill>
+                                  <a:latin typeface="Cambria Math" panose="02040503050406030204" pitchFamily="18" charset="0"/>
+                                </a:rPr>
+                                <m:t> </m:t>
+                              </m:r>
                               <m:r>
                                 <a:rPr lang="en-US" i="1">
                                   <a:solidFill>
@@ -16322,7 +16310,7 @@
                       <m:func>
                         <m:funcPr>
                           <m:ctrlPr>
-                            <a:rPr lang="en-US" b="0" i="1" smtClean="0">
+                            <a:rPr lang="en-US" b="0" i="0" smtClean="0">
                               <a:solidFill>
                                 <a:schemeClr val="tx1"/>
                               </a:solidFill>
@@ -16439,11 +16427,11 @@
                         </m:e>
                       </m:d>
                     </m:oMath>
-                    <m:oMath xmlns:m="http://schemas.openxmlformats.org/officeDocument/2006/math">
+                    <m:oMath>
                       <m:func>
                         <m:funcPr>
                           <m:ctrlPr>
-                            <a:rPr lang="en-US" b="0" i="1" smtClean="0">
+                            <a:rPr lang="en-US" b="0" i="0" smtClean="0">
                               <a:solidFill>
                                 <a:schemeClr val="tx1"/>
                               </a:solidFill>
@@ -16524,7 +16512,7 @@
                           <m:func>
                             <m:funcPr>
                               <m:ctrlPr>
-                                <a:rPr lang="en-US" b="0" i="1" smtClean="0">
+                                <a:rPr lang="en-US" b="0" i="0" smtClean="0">
                                   <a:solidFill>
                                     <a:schemeClr val="tx1"/>
                                   </a:solidFill>
@@ -16554,7 +16542,7 @@
                                   </a:solidFill>
                                   <a:latin typeface="Cambria Math" panose="02040503050406030204" pitchFamily="18" charset="0"/>
                                 </a:rPr>
-                                <m:t>𝑢</m:t>
+                                <m:t>𝑘</m:t>
                               </m:r>
                               <m:d>
                                 <m:dPr>
@@ -16584,7 +16572,7 @@
                                       </a:solidFill>
                                       <a:latin typeface="Cambria Math" panose="02040503050406030204" pitchFamily="18" charset="0"/>
                                     </a:rPr>
-                                    <m:t>,</m:t>
+                                    <m:t> | </m:t>
                                   </m:r>
                                   <m:r>
                                     <a:rPr lang="en-US" b="0" i="1" smtClean="0">
@@ -16604,72 +16592,43 @@
                                   </a:solidFill>
                                   <a:latin typeface="Cambria Math" panose="02040503050406030204" pitchFamily="18" charset="0"/>
                                 </a:rPr>
-                                <m:t>−</m:t>
+                                <m:t>+</m:t>
                               </m:r>
-                              <m:func>
-                                <m:funcPr>
+                              <m:r>
+                                <a:rPr lang="en-US" i="1">
+                                  <a:latin typeface="Cambria Math" panose="02040503050406030204" pitchFamily="18" charset="0"/>
+                                </a:rPr>
+                                <m:t>𝑓</m:t>
+                              </m:r>
+                              <m:d>
+                                <m:dPr>
                                   <m:ctrlPr>
-                                    <a:rPr lang="en-US" b="0" i="1" smtClean="0">
-                                      <a:solidFill>
-                                        <a:schemeClr val="tx1"/>
-                                      </a:solidFill>
+                                    <a:rPr lang="en-US" i="1">
                                       <a:latin typeface="Cambria Math" panose="02040503050406030204" pitchFamily="18" charset="0"/>
                                     </a:rPr>
                                   </m:ctrlPr>
-                                </m:funcPr>
-                                <m:fName>
+                                </m:dPr>
+                                <m:e>
                                   <m:r>
-                                    <m:rPr>
-                                      <m:sty m:val="p"/>
-                                    </m:rPr>
-                                    <a:rPr lang="en-US" b="0" i="0" smtClean="0">
-                                      <a:solidFill>
-                                        <a:schemeClr val="tx1"/>
-                                      </a:solidFill>
+                                    <a:rPr lang="en-US" i="1">
                                       <a:latin typeface="Cambria Math" panose="02040503050406030204" pitchFamily="18" charset="0"/>
                                     </a:rPr>
-                                    <m:t>log</m:t>
+                                    <m:t>𝑥</m:t>
                                   </m:r>
-                                </m:fName>
-                                <m:e>
                                   <m:r>
-                                    <a:rPr lang="en-US" b="0" i="1" smtClean="0">
-                                      <a:solidFill>
-                                        <a:schemeClr val="tx1"/>
-                                      </a:solidFill>
+                                    <a:rPr lang="en-US" i="1">
                                       <a:latin typeface="Cambria Math" panose="02040503050406030204" pitchFamily="18" charset="0"/>
                                     </a:rPr>
-                                    <m:t>𝜋</m:t>
+                                    <m:t>, </m:t>
                                   </m:r>
                                   <m:r>
-                                    <a:rPr lang="en-US" b="0" i="1" smtClean="0">
-                                      <a:solidFill>
-                                        <a:schemeClr val="tx1"/>
-                                      </a:solidFill>
-                                      <a:latin typeface="Cambria Math" panose="02040503050406030204" pitchFamily="18" charset="0"/>
-                                    </a:rPr>
-                                    <m:t>(</m:t>
-                                  </m:r>
-                                  <m:r>
-                                    <a:rPr lang="en-US" b="0" i="1" smtClean="0">
-                                      <a:solidFill>
-                                        <a:schemeClr val="tx1"/>
-                                      </a:solidFill>
+                                    <a:rPr lang="en-US" i="1">
                                       <a:latin typeface="Cambria Math" panose="02040503050406030204" pitchFamily="18" charset="0"/>
                                     </a:rPr>
                                     <m:t>𝜃</m:t>
                                   </m:r>
-                                  <m:r>
-                                    <a:rPr lang="en-US" b="0" i="1" smtClean="0">
-                                      <a:solidFill>
-                                        <a:schemeClr val="tx1"/>
-                                      </a:solidFill>
-                                      <a:latin typeface="Cambria Math" panose="02040503050406030204" pitchFamily="18" charset="0"/>
-                                    </a:rPr>
-                                    <m:t>)</m:t>
-                                  </m:r>
                                 </m:e>
-                              </m:func>
+                              </m:d>
                             </m:e>
                           </m:func>
                           <m:r>
@@ -16686,6 +16645,14 @@
                     </m:oMath>
                   </m:oMathPara>
                 </a14:m>
+                <a:br>
+                  <a:rPr lang="en-US" b="0" i="1" dirty="0">
+                    <a:solidFill>
+                      <a:schemeClr val="tx1"/>
+                    </a:solidFill>
+                    <a:latin typeface="Cambria Math" panose="02040503050406030204" pitchFamily="18" charset="0"/>
+                  </a:rPr>
+                </a:br>
                 <a:endParaRPr lang="en-US" b="0" i="1" dirty="0">
                   <a:solidFill>
                     <a:schemeClr val="tx1"/>
@@ -16710,7 +16677,7 @@
             </p:txBody>
           </p:sp>
         </mc:Choice>
-        <mc:Fallback xmlns="">
+        <mc:Fallback>
           <p:sp>
             <p:nvSpPr>
               <p:cNvPr id="8" name="Content Placeholder 7">
@@ -16776,287 +16743,6 @@
       </p:transition>
     </mc:Fallback>
   </mc:AlternateContent>
-  <p:timing>
-    <p:tnLst>
-      <p:par>
-        <p:cTn id="1" dur="indefinite" restart="never" nodeType="tmRoot">
-          <p:childTnLst>
-            <p:seq concurrent="1" nextAc="seek">
-              <p:cTn id="2" dur="indefinite" nodeType="mainSeq">
-                <p:childTnLst>
-                  <p:par>
-                    <p:cTn id="3" fill="hold">
-                      <p:stCondLst>
-                        <p:cond delay="indefinite"/>
-                      </p:stCondLst>
-                      <p:childTnLst>
-                        <p:par>
-                          <p:cTn id="4" fill="hold">
-                            <p:stCondLst>
-                              <p:cond delay="0"/>
-                            </p:stCondLst>
-                            <p:childTnLst>
-                              <p:par>
-                                <p:cTn id="5" presetID="10" presetClass="entr" presetSubtype="0" fill="hold" nodeType="clickEffect">
-                                  <p:stCondLst>
-                                    <p:cond delay="0"/>
-                                  </p:stCondLst>
-                                  <p:childTnLst>
-                                    <p:set>
-                                      <p:cBhvr>
-                                        <p:cTn id="6" dur="1" fill="hold">
-                                          <p:stCondLst>
-                                            <p:cond delay="0"/>
-                                          </p:stCondLst>
-                                        </p:cTn>
-                                        <p:tgtEl>
-                                          <p:spTgt spid="8">
-                                            <p:txEl>
-                                              <p:pRg st="3" end="3"/>
-                                            </p:txEl>
-                                          </p:spTgt>
-                                        </p:tgtEl>
-                                        <p:attrNameLst>
-                                          <p:attrName>style.visibility</p:attrName>
-                                        </p:attrNameLst>
-                                      </p:cBhvr>
-                                      <p:to>
-                                        <p:strVal val="visible"/>
-                                      </p:to>
-                                    </p:set>
-                                    <p:animEffect transition="in" filter="fade">
-                                      <p:cBhvr>
-                                        <p:cTn id="7" dur="500"/>
-                                        <p:tgtEl>
-                                          <p:spTgt spid="8">
-                                            <p:txEl>
-                                              <p:pRg st="3" end="3"/>
-                                            </p:txEl>
-                                          </p:spTgt>
-                                        </p:tgtEl>
-                                      </p:cBhvr>
-                                    </p:animEffect>
-                                  </p:childTnLst>
-                                </p:cTn>
-                              </p:par>
-                              <p:par>
-                                <p:cTn id="8" presetID="10" presetClass="entr" presetSubtype="0" fill="hold" nodeType="withEffect">
-                                  <p:stCondLst>
-                                    <p:cond delay="0"/>
-                                  </p:stCondLst>
-                                  <p:childTnLst>
-                                    <p:set>
-                                      <p:cBhvr>
-                                        <p:cTn id="9" dur="1" fill="hold">
-                                          <p:stCondLst>
-                                            <p:cond delay="0"/>
-                                          </p:stCondLst>
-                                        </p:cTn>
-                                        <p:tgtEl>
-                                          <p:spTgt spid="8">
-                                            <p:txEl>
-                                              <p:pRg st="4" end="4"/>
-                                            </p:txEl>
-                                          </p:spTgt>
-                                        </p:tgtEl>
-                                        <p:attrNameLst>
-                                          <p:attrName>style.visibility</p:attrName>
-                                        </p:attrNameLst>
-                                      </p:cBhvr>
-                                      <p:to>
-                                        <p:strVal val="visible"/>
-                                      </p:to>
-                                    </p:set>
-                                    <p:animEffect transition="in" filter="fade">
-                                      <p:cBhvr>
-                                        <p:cTn id="10" dur="500"/>
-                                        <p:tgtEl>
-                                          <p:spTgt spid="8">
-                                            <p:txEl>
-                                              <p:pRg st="4" end="4"/>
-                                            </p:txEl>
-                                          </p:spTgt>
-                                        </p:tgtEl>
-                                      </p:cBhvr>
-                                    </p:animEffect>
-                                  </p:childTnLst>
-                                </p:cTn>
-                              </p:par>
-                              <p:par>
-                                <p:cTn id="11" presetID="10" presetClass="entr" presetSubtype="0" fill="hold" nodeType="withEffect">
-                                  <p:stCondLst>
-                                    <p:cond delay="0"/>
-                                  </p:stCondLst>
-                                  <p:childTnLst>
-                                    <p:set>
-                                      <p:cBhvr>
-                                        <p:cTn id="12" dur="1" fill="hold">
-                                          <p:stCondLst>
-                                            <p:cond delay="0"/>
-                                          </p:stCondLst>
-                                        </p:cTn>
-                                        <p:tgtEl>
-                                          <p:spTgt spid="8">
-                                            <p:txEl>
-                                              <p:pRg st="7" end="7"/>
-                                            </p:txEl>
-                                          </p:spTgt>
-                                        </p:tgtEl>
-                                        <p:attrNameLst>
-                                          <p:attrName>style.visibility</p:attrName>
-                                        </p:attrNameLst>
-                                      </p:cBhvr>
-                                      <p:to>
-                                        <p:strVal val="visible"/>
-                                      </p:to>
-                                    </p:set>
-                                    <p:animEffect transition="in" filter="fade">
-                                      <p:cBhvr>
-                                        <p:cTn id="13" dur="500"/>
-                                        <p:tgtEl>
-                                          <p:spTgt spid="8">
-                                            <p:txEl>
-                                              <p:pRg st="7" end="7"/>
-                                            </p:txEl>
-                                          </p:spTgt>
-                                        </p:tgtEl>
-                                      </p:cBhvr>
-                                    </p:animEffect>
-                                  </p:childTnLst>
-                                </p:cTn>
-                              </p:par>
-                            </p:childTnLst>
-                          </p:cTn>
-                        </p:par>
-                      </p:childTnLst>
-                    </p:cTn>
-                  </p:par>
-                  <p:par>
-                    <p:cTn id="14" fill="hold">
-                      <p:stCondLst>
-                        <p:cond delay="indefinite"/>
-                      </p:stCondLst>
-                      <p:childTnLst>
-                        <p:par>
-                          <p:cTn id="15" fill="hold">
-                            <p:stCondLst>
-                              <p:cond delay="0"/>
-                            </p:stCondLst>
-                            <p:childTnLst>
-                              <p:par>
-                                <p:cTn id="16" presetID="10" presetClass="entr" presetSubtype="0" fill="hold" nodeType="clickEffect">
-                                  <p:stCondLst>
-                                    <p:cond delay="0"/>
-                                  </p:stCondLst>
-                                  <p:childTnLst>
-                                    <p:set>
-                                      <p:cBhvr>
-                                        <p:cTn id="17" dur="1" fill="hold">
-                                          <p:stCondLst>
-                                            <p:cond delay="0"/>
-                                          </p:stCondLst>
-                                        </p:cTn>
-                                        <p:tgtEl>
-                                          <p:spTgt spid="8">
-                                            <p:txEl>
-                                              <p:pRg st="5" end="5"/>
-                                            </p:txEl>
-                                          </p:spTgt>
-                                        </p:tgtEl>
-                                        <p:attrNameLst>
-                                          <p:attrName>style.visibility</p:attrName>
-                                        </p:attrNameLst>
-                                      </p:cBhvr>
-                                      <p:to>
-                                        <p:strVal val="visible"/>
-                                      </p:to>
-                                    </p:set>
-                                    <p:animEffect transition="in" filter="fade">
-                                      <p:cBhvr>
-                                        <p:cTn id="18" dur="500"/>
-                                        <p:tgtEl>
-                                          <p:spTgt spid="8">
-                                            <p:txEl>
-                                              <p:pRg st="5" end="5"/>
-                                            </p:txEl>
-                                          </p:spTgt>
-                                        </p:tgtEl>
-                                      </p:cBhvr>
-                                    </p:animEffect>
-                                  </p:childTnLst>
-                                </p:cTn>
-                              </p:par>
-                              <p:par>
-                                <p:cTn id="19" presetID="10" presetClass="entr" presetSubtype="0" fill="hold" nodeType="withEffect">
-                                  <p:stCondLst>
-                                    <p:cond delay="0"/>
-                                  </p:stCondLst>
-                                  <p:childTnLst>
-                                    <p:set>
-                                      <p:cBhvr>
-                                        <p:cTn id="20" dur="1" fill="hold">
-                                          <p:stCondLst>
-                                            <p:cond delay="0"/>
-                                          </p:stCondLst>
-                                        </p:cTn>
-                                        <p:tgtEl>
-                                          <p:spTgt spid="8">
-                                            <p:txEl>
-                                              <p:pRg st="6" end="6"/>
-                                            </p:txEl>
-                                          </p:spTgt>
-                                        </p:tgtEl>
-                                        <p:attrNameLst>
-                                          <p:attrName>style.visibility</p:attrName>
-                                        </p:attrNameLst>
-                                      </p:cBhvr>
-                                      <p:to>
-                                        <p:strVal val="visible"/>
-                                      </p:to>
-                                    </p:set>
-                                    <p:animEffect transition="in" filter="fade">
-                                      <p:cBhvr>
-                                        <p:cTn id="21" dur="500"/>
-                                        <p:tgtEl>
-                                          <p:spTgt spid="8">
-                                            <p:txEl>
-                                              <p:pRg st="6" end="6"/>
-                                            </p:txEl>
-                                          </p:spTgt>
-                                        </p:tgtEl>
-                                      </p:cBhvr>
-                                    </p:animEffect>
-                                  </p:childTnLst>
-                                </p:cTn>
-                              </p:par>
-                            </p:childTnLst>
-                          </p:cTn>
-                        </p:par>
-                      </p:childTnLst>
-                    </p:cTn>
-                  </p:par>
-                </p:childTnLst>
-              </p:cTn>
-              <p:prevCondLst>
-                <p:cond evt="onPrev" delay="0">
-                  <p:tgtEl>
-                    <p:sldTgt/>
-                  </p:tgtEl>
-                </p:cond>
-              </p:prevCondLst>
-              <p:nextCondLst>
-                <p:cond evt="onNext" delay="0">
-                  <p:tgtEl>
-                    <p:sldTgt/>
-                  </p:tgtEl>
-                </p:cond>
-              </p:nextCondLst>
-            </p:seq>
-          </p:childTnLst>
-        </p:cTn>
-      </p:par>
-    </p:tnLst>
-  </p:timing>
 </p:sld>
 </file>
 
@@ -17377,10 +17063,7 @@
                 </a:pPr>
                 <a14:m>
                   <m:oMathPara xmlns:m="http://schemas.openxmlformats.org/officeDocument/2006/math">
-                    <m:oMathParaPr>
-                      <m:jc m:val="centerGroup"/>
-                    </m:oMathParaPr>
-                    <m:oMath xmlns:m="http://schemas.openxmlformats.org/officeDocument/2006/math">
+                    <m:oMath>
                       <m:r>
                         <a:rPr lang="en-US" b="0" i="1" smtClean="0">
                           <a:latin typeface="Cambria Math" panose="02040503050406030204" pitchFamily="18" charset="0"/>
@@ -17653,10 +17336,7 @@
                 </a:pPr>
                 <a14:m>
                   <m:oMathPara xmlns:m="http://schemas.openxmlformats.org/officeDocument/2006/math">
-                    <m:oMathParaPr>
-                      <m:jc m:val="centerGroup"/>
-                    </m:oMathParaPr>
-                    <m:oMath xmlns:m="http://schemas.openxmlformats.org/officeDocument/2006/math">
+                    <m:oMath>
                       <m:nary>
                         <m:naryPr>
                           <m:limLoc m:val="undOvr"/>
@@ -17723,7 +17403,7 @@
                           <m:d>
                             <m:dPr>
                               <m:ctrlPr>
-                                <a:rPr lang="en-US" i="1">
+                                <a:rPr lang="en-US" b="0" i="1" smtClean="0">
                                   <a:latin typeface="Cambria Math" panose="02040503050406030204" pitchFamily="18" charset="0"/>
                                 </a:rPr>
                               </m:ctrlPr>
@@ -18926,10 +18606,7 @@
                 </a:pPr>
                 <a14:m>
                   <m:oMathPara xmlns:m="http://schemas.openxmlformats.org/officeDocument/2006/math">
-                    <m:oMathParaPr>
-                      <m:jc m:val="centerGroup"/>
-                    </m:oMathParaPr>
-                    <m:oMath xmlns:m="http://schemas.openxmlformats.org/officeDocument/2006/math">
+                    <m:oMath>
                       <m:sSub>
                         <m:sSubPr>
                           <m:ctrlPr>
@@ -19520,10 +19197,7 @@
                 </a:pPr>
                 <a14:m>
                   <m:oMathPara xmlns:m="http://schemas.openxmlformats.org/officeDocument/2006/math">
-                    <m:oMathParaPr>
-                      <m:jc m:val="centerGroup"/>
-                    </m:oMathParaPr>
-                    <m:oMath xmlns:m="http://schemas.openxmlformats.org/officeDocument/2006/math">
+                    <m:oMath>
                       <m:sSub>
                         <m:sSubPr>
                           <m:ctrlPr>
@@ -19714,7 +19388,7 @@
                     <m:oMathParaPr>
                       <m:jc m:val="left"/>
                     </m:oMathParaPr>
-                    <m:oMath xmlns:m="http://schemas.openxmlformats.org/officeDocument/2006/math">
+                    <m:oMath>
                       <m:r>
                         <a:rPr lang="en-US" i="1">
                           <a:latin typeface="Cambria Math" panose="02040503050406030204" pitchFamily="18" charset="0"/>
@@ -19725,7 +19399,11 @@
                         <m:dPr>
                           <m:ctrlPr>
                             <a:rPr lang="en-US" i="1">
+                              <a:solidFill>
+                                <a:srgbClr val="000000"/>
+                              </a:solidFill>
                               <a:latin typeface="Cambria Math" panose="02040503050406030204" pitchFamily="18" charset="0"/>
+                              <a:ea typeface="Cambria Math" panose="02040503050406030204" pitchFamily="18" charset="0"/>
                             </a:rPr>
                           </m:ctrlPr>
                         </m:dPr>
@@ -19799,7 +19477,11 @@
                         <m:dPr>
                           <m:ctrlPr>
                             <a:rPr lang="en-US" i="1">
+                              <a:solidFill>
+                                <a:srgbClr val="000000"/>
+                              </a:solidFill>
                               <a:latin typeface="Cambria Math" panose="02040503050406030204" pitchFamily="18" charset="0"/>
+                              <a:ea typeface="Cambria Math" panose="02040503050406030204" pitchFamily="18" charset="0"/>
                             </a:rPr>
                           </m:ctrlPr>
                         </m:dPr>
@@ -19886,7 +19568,7 @@
                             <m:rPr>
                               <m:nor/>
                             </m:rPr>
-                            <a:rPr lang="en-US" dirty="0">
+                            <a:rPr lang="en-US" i="0" dirty="0">
                               <a:solidFill>
                                 <a:srgbClr val="000000"/>
                               </a:solidFill>
@@ -20010,7 +19692,7 @@
                       <m:rPr>
                         <m:nor/>
                       </m:rPr>
-                      <a:rPr lang="en-US" dirty="0">
+                      <a:rPr lang="en-US" i="0" dirty="0">
                         <a:solidFill>
                           <a:srgbClr val="0033CC"/>
                         </a:solidFill>
@@ -20155,10 +19837,7 @@
                 </a:pPr>
                 <a14:m>
                   <m:oMathPara xmlns:m="http://schemas.openxmlformats.org/officeDocument/2006/math">
-                    <m:oMathParaPr>
-                      <m:jc m:val="centerGroup"/>
-                    </m:oMathParaPr>
-                    <m:oMath xmlns:m="http://schemas.openxmlformats.org/officeDocument/2006/math">
+                    <m:oMath>
                       <m:r>
                         <a:rPr lang="en-US" i="1">
                           <a:solidFill>
@@ -20384,7 +20063,11 @@
                       <m:dPr>
                         <m:ctrlPr>
                           <a:rPr lang="en-US" i="1">
-                            <a:latin typeface="Cambria Math" panose="02040503050406030204" pitchFamily="18" charset="0"/>
+                            <a:solidFill>
+                              <a:srgbClr val="000000"/>
+                            </a:solidFill>
+                            <a:latin typeface="Cambria Math" panose="02040503050406030204" pitchFamily="18" charset="0"/>
+                            <a:ea typeface="Cambria Math" panose="02040503050406030204" pitchFamily="18" charset="0"/>
                           </a:rPr>
                         </m:ctrlPr>
                       </m:dPr>
@@ -20458,7 +20141,11 @@
                       <m:dPr>
                         <m:ctrlPr>
                           <a:rPr lang="en-US" i="1">
-                            <a:latin typeface="Cambria Math" panose="02040503050406030204" pitchFamily="18" charset="0"/>
+                            <a:solidFill>
+                              <a:srgbClr val="000000"/>
+                            </a:solidFill>
+                            <a:latin typeface="Cambria Math" panose="02040503050406030204" pitchFamily="18" charset="0"/>
+                            <a:ea typeface="Cambria Math" panose="02040503050406030204" pitchFamily="18" charset="0"/>
                           </a:rPr>
                         </m:ctrlPr>
                       </m:dPr>
@@ -21050,8 +20737,8 @@
           <a:chExt cx="0" cy="0"/>
         </a:xfrm>
       </p:grpSpPr>
-      <mc:AlternateContent xmlns:mc="http://schemas.openxmlformats.org/markup-compatibility/2006" xmlns:a14="http://schemas.microsoft.com/office/drawing/2010/main">
-        <mc:Choice Requires="a14">
+      <mc:AlternateContent xmlns:mc="http://schemas.openxmlformats.org/markup-compatibility/2006">
+        <mc:Choice xmlns:a14="http://schemas.microsoft.com/office/drawing/2010/main" Requires="a14">
           <p:sp>
             <p:nvSpPr>
               <p:cNvPr id="4" name="Content Placeholder 3">
@@ -21088,10 +20775,7 @@
                 </a:pPr>
                 <a14:m>
                   <m:oMathPara xmlns:m="http://schemas.openxmlformats.org/officeDocument/2006/math">
-                    <m:oMathParaPr>
-                      <m:jc m:val="centerGroup"/>
-                    </m:oMathParaPr>
-                    <m:oMath xmlns:m="http://schemas.openxmlformats.org/officeDocument/2006/math">
+                    <m:oMath>
                       <m:nary>
                         <m:naryPr>
                           <m:limLoc m:val="undOvr"/>
@@ -21218,7 +20902,7 @@
                 </a:pPr>
                 <a:r>
                   <a:rPr lang="en-US" dirty="0"/>
-                  <a:t>it was shown in Lecture 2 and tutorial 2 that a binary classifier </a:t>
+                  <a:t>it was shown in Lecture 2 that a binary classifier </a:t>
                 </a:r>
                 <a14:m>
                   <m:oMath xmlns:m="http://schemas.openxmlformats.org/officeDocument/2006/math">
@@ -21286,12 +20970,43 @@
                   </a:rPr>
                   <a:t>  </a:t>
                 </a:r>
+                <a:br>
+                  <a:rPr lang="en-US" b="1" dirty="0">
+                    <a:solidFill>
+                      <a:srgbClr val="0033CC"/>
+                    </a:solidFill>
+                  </a:rPr>
+                </a:br>
+                <a:endParaRPr lang="en-US" b="0" i="1" dirty="0">
+                  <a:solidFill>
+                    <a:srgbClr val="0033CC"/>
+                  </a:solidFill>
+                  <a:latin typeface="Cambria Math" panose="02040503050406030204" pitchFamily="18" charset="0"/>
+                  <a:ea typeface="Cambria Math" charset="0"/>
+                  <a:cs typeface="Cambria Math" charset="0"/>
+                </a:endParaRPr>
+              </a:p>
+              <a:p>
+                <a:pPr>
+                  <a:buFont typeface="Marlett" pitchFamily="26" charset="0"/>
+                  <a:buNone/>
+                </a:pPr>
+                <a:r>
+                  <a:rPr lang="en-US" b="0" dirty="0">
+                    <a:solidFill>
+                      <a:schemeClr val="tx1"/>
+                    </a:solidFill>
+                    <a:ea typeface="Cambria Math" charset="0"/>
+                    <a:cs typeface="Cambria Math" charset="0"/>
+                  </a:rPr>
+                  <a:t>	</a:t>
+                </a:r>
                 <a14:m>
                   <m:oMath xmlns:m="http://schemas.openxmlformats.org/officeDocument/2006/math">
                     <m:r>
                       <a:rPr lang="en-US" b="0" i="1" smtClean="0">
                         <a:solidFill>
-                          <a:srgbClr val="0033CC"/>
+                          <a:schemeClr val="tx1"/>
                         </a:solidFill>
                         <a:latin typeface="Cambria Math" panose="02040503050406030204" pitchFamily="18" charset="0"/>
                         <a:ea typeface="Cambria Math" charset="0"/>
@@ -21304,7 +21019,7 @@
                         <m:ctrlPr>
                           <a:rPr lang="en-US" b="0" i="1" smtClean="0">
                             <a:solidFill>
-                              <a:srgbClr val="0033CC"/>
+                              <a:schemeClr val="tx1"/>
                             </a:solidFill>
                             <a:latin typeface="Cambria Math" panose="02040503050406030204" pitchFamily="18" charset="0"/>
                             <a:ea typeface="Cambria Math" charset="0"/>
@@ -21316,7 +21031,7 @@
                         <m:r>
                           <a:rPr lang="en-US" b="0" i="1" smtClean="0">
                             <a:solidFill>
-                              <a:srgbClr val="0033CC"/>
+                              <a:schemeClr val="tx1"/>
                             </a:solidFill>
                             <a:latin typeface="Cambria Math" panose="02040503050406030204" pitchFamily="18" charset="0"/>
                             <a:ea typeface="Cambria Math" charset="0"/>
@@ -21327,7 +21042,7 @@
                         <m:r>
                           <a:rPr lang="en-US" b="0" i="1" smtClean="0">
                             <a:solidFill>
-                              <a:srgbClr val="0033CC"/>
+                              <a:schemeClr val="tx1"/>
                             </a:solidFill>
                             <a:latin typeface="Cambria Math" panose="02040503050406030204" pitchFamily="18" charset="0"/>
                             <a:ea typeface="Cambria Math" charset="0"/>
@@ -21338,7 +21053,7 @@
                         <m:r>
                           <a:rPr lang="en-US" b="0" i="1" smtClean="0">
                             <a:solidFill>
-                              <a:srgbClr val="0033CC"/>
+                              <a:schemeClr val="tx1"/>
                             </a:solidFill>
                             <a:latin typeface="Cambria Math" panose="02040503050406030204" pitchFamily="18" charset="0"/>
                             <a:ea typeface="Cambria Math" charset="0"/>
@@ -21351,7 +21066,7 @@
                     <m:r>
                       <a:rPr lang="en-US" b="0" i="1" smtClean="0">
                         <a:solidFill>
-                          <a:srgbClr val="0033CC"/>
+                          <a:schemeClr val="tx1"/>
                         </a:solidFill>
                         <a:latin typeface="Cambria Math" panose="02040503050406030204" pitchFamily="18" charset="0"/>
                         <a:ea typeface="Cambria Math" charset="0"/>
@@ -21362,7 +21077,7 @@
                     <m:r>
                       <a:rPr lang="en-US" b="0" i="1" smtClean="0">
                         <a:solidFill>
-                          <a:srgbClr val="0033CC"/>
+                          <a:schemeClr val="tx1"/>
                         </a:solidFill>
                         <a:latin typeface="Cambria Math" panose="02040503050406030204" pitchFamily="18" charset="0"/>
                         <a:ea typeface="Cambria Math" charset="0"/>
@@ -21373,9 +21088,9 @@
                     <m:func>
                       <m:funcPr>
                         <m:ctrlPr>
-                          <a:rPr lang="en-US" i="1">
+                          <a:rPr lang="en-US">
                             <a:solidFill>
-                              <a:srgbClr val="0033CC"/>
+                              <a:schemeClr val="tx1"/>
                             </a:solidFill>
                             <a:latin typeface="Cambria Math" panose="02040503050406030204" pitchFamily="18" charset="0"/>
                             <a:ea typeface="Cambria Math" charset="0"/>
@@ -21390,7 +21105,7 @@
                           </m:rPr>
                           <a:rPr lang="en-US">
                             <a:solidFill>
-                              <a:srgbClr val="0033CC"/>
+                              <a:schemeClr val="tx1"/>
                             </a:solidFill>
                             <a:latin typeface="Cambria Math" panose="02040503050406030204" pitchFamily="18" charset="0"/>
                             <a:ea typeface="Cambria Math" charset="0"/>
@@ -21403,7 +21118,7 @@
                         <m:r>
                           <a:rPr lang="en-US" i="1">
                             <a:solidFill>
-                              <a:srgbClr val="0033CC"/>
+                              <a:schemeClr val="tx1"/>
                             </a:solidFill>
                             <a:latin typeface="Cambria Math" panose="02040503050406030204" pitchFamily="18" charset="0"/>
                             <a:ea typeface="Cambria Math" charset="0"/>
@@ -21414,7 +21129,7 @@
                         <m:r>
                           <a:rPr lang="en-US" i="1">
                             <a:solidFill>
-                              <a:srgbClr val="0033CC"/>
+                              <a:schemeClr val="tx1"/>
                             </a:solidFill>
                             <a:latin typeface="Cambria Math" panose="02040503050406030204" pitchFamily="18" charset="0"/>
                             <a:ea typeface="Cambria Math" charset="0"/>
@@ -21427,7 +21142,7 @@
                             <m:ctrlPr>
                               <a:rPr lang="en-US" i="1">
                                 <a:solidFill>
-                                  <a:srgbClr val="0033CC"/>
+                                  <a:schemeClr val="tx1"/>
                                 </a:solidFill>
                                 <a:latin typeface="Cambria Math" panose="02040503050406030204" pitchFamily="18" charset="0"/>
                                 <a:ea typeface="Cambria Math" charset="0"/>
@@ -21439,7 +21154,7 @@
                             <m:r>
                               <a:rPr lang="en-US" i="1">
                                 <a:solidFill>
-                                  <a:srgbClr val="0033CC"/>
+                                  <a:schemeClr val="tx1"/>
                                 </a:solidFill>
                                 <a:latin typeface="Cambria Math" panose="02040503050406030204" pitchFamily="18" charset="0"/>
                                 <a:ea typeface="Cambria Math" charset="0"/>
@@ -21450,7 +21165,7 @@
                             <m:r>
                               <a:rPr lang="en-US" i="1">
                                 <a:solidFill>
-                                  <a:srgbClr val="0033CC"/>
+                                  <a:schemeClr val="tx1"/>
                                 </a:solidFill>
                                 <a:latin typeface="Cambria Math" panose="02040503050406030204" pitchFamily="18" charset="0"/>
                                 <a:ea typeface="Cambria Math" charset="0"/>
@@ -21463,9 +21178,9 @@
                         <m:func>
                           <m:funcPr>
                             <m:ctrlPr>
-                              <a:rPr lang="en-US" i="1">
+                              <a:rPr lang="en-US">
                                 <a:solidFill>
-                                  <a:srgbClr val="0033CC"/>
+                                  <a:schemeClr val="tx1"/>
                                 </a:solidFill>
                                 <a:latin typeface="Cambria Math" panose="02040503050406030204" pitchFamily="18" charset="0"/>
                                 <a:ea typeface="Cambria Math" charset="0"/>
@@ -21480,7 +21195,7 @@
                               </m:rPr>
                               <a:rPr lang="en-US">
                                 <a:solidFill>
-                                  <a:srgbClr val="0033CC"/>
+                                  <a:schemeClr val="tx1"/>
                                 </a:solidFill>
                                 <a:latin typeface="Cambria Math" panose="02040503050406030204" pitchFamily="18" charset="0"/>
                                 <a:ea typeface="Cambria Math" charset="0"/>
@@ -21493,7 +21208,7 @@
                             <m:r>
                               <a:rPr lang="en-US" i="1">
                                 <a:solidFill>
-                                  <a:srgbClr val="0033CC"/>
+                                  <a:schemeClr val="tx1"/>
                                 </a:solidFill>
                                 <a:latin typeface="Cambria Math" panose="02040503050406030204" pitchFamily="18" charset="0"/>
                                 <a:ea typeface="Cambria Math" charset="0"/>
@@ -21504,7 +21219,7 @@
                             <m:r>
                               <a:rPr lang="en-US" i="1">
                                 <a:solidFill>
-                                  <a:srgbClr val="0033CC"/>
+                                  <a:schemeClr val="tx1"/>
                                 </a:solidFill>
                                 <a:latin typeface="Cambria Math" panose="02040503050406030204" pitchFamily="18" charset="0"/>
                                 <a:ea typeface="Cambria Math" charset="0"/>
@@ -21515,7 +21230,7 @@
                             <m:r>
                               <a:rPr lang="en-US" i="1">
                                 <a:solidFill>
-                                  <a:srgbClr val="0033CC"/>
+                                  <a:schemeClr val="tx1"/>
                                 </a:solidFill>
                                 <a:latin typeface="Cambria Math" panose="02040503050406030204" pitchFamily="18" charset="0"/>
                                 <a:ea typeface="Cambria Math" charset="0"/>
@@ -21530,7 +21245,7 @@
                     <m:r>
                       <a:rPr lang="en-US">
                         <a:solidFill>
-                          <a:srgbClr val="0033CC"/>
+                          <a:schemeClr val="tx1"/>
                         </a:solidFill>
                         <a:latin typeface="Cambria Math" panose="02040503050406030204" pitchFamily="18" charset="0"/>
                         <a:ea typeface="Cambria Math" charset="0"/>
@@ -21541,145 +21256,160 @@
                   </m:oMath>
                 </a14:m>
                 <a:r>
-                  <a:rPr lang="en-US" dirty="0"/>
-                  <a:t> approximates the </a:t>
-                </a:r>
-                <a:r>
-                  <a:rPr lang="en-US" b="1" dirty="0">
+                  <a:rPr lang="en-US" dirty="0">
                     <a:solidFill>
-                      <a:srgbClr val="0033CC"/>
+                      <a:schemeClr val="tx1"/>
                     </a:solidFill>
                   </a:rPr>
-                  <a:t>class probability</a:t>
-                </a:r>
+                  <a:t> </a:t>
+                </a:r>
+                <a:br>
+                  <a:rPr lang="en-US" dirty="0">
+                    <a:solidFill>
+                      <a:schemeClr val="tx1"/>
+                    </a:solidFill>
+                  </a:rPr>
+                </a:br>
+                <a:endParaRPr lang="en-US" dirty="0">
+                  <a:solidFill>
+                    <a:schemeClr val="tx1"/>
+                  </a:solidFill>
+                </a:endParaRPr>
               </a:p>
               <a:p>
                 <a:pPr>
                   <a:buFont typeface="Marlett" pitchFamily="26" charset="0"/>
                   <a:buNone/>
                 </a:pPr>
+                <a:r>
+                  <a:rPr lang="en-US" dirty="0"/>
+                  <a:t>approximates the </a:t>
+                </a:r>
+                <a:r>
+                  <a:rPr lang="en-US" b="1" dirty="0">
+                    <a:solidFill>
+                      <a:srgbClr val="0033CC"/>
+                    </a:solidFill>
+                  </a:rPr>
+                  <a:t>class probability </a:t>
+                </a:r>
                 <a14:m>
-                  <m:oMathPara xmlns:m="http://schemas.openxmlformats.org/officeDocument/2006/math">
-                    <m:oMathParaPr>
-                      <m:jc m:val="centerGroup"/>
-                    </m:oMathParaPr>
-                    <m:oMath xmlns:m="http://schemas.openxmlformats.org/officeDocument/2006/math">
-                      <m:r>
-                        <a:rPr lang="en-US" i="1" dirty="0">
-                          <a:latin typeface="Cambria Math" panose="02040503050406030204" pitchFamily="18" charset="0"/>
-                        </a:rPr>
-                        <m:t>𝑓</m:t>
-                      </m:r>
-                      <m:d>
-                        <m:dPr>
-                          <m:ctrlPr>
-                            <a:rPr lang="en-US" i="1" dirty="0">
-                              <a:latin typeface="Cambria Math" panose="02040503050406030204" pitchFamily="18" charset="0"/>
-                            </a:rPr>
-                          </m:ctrlPr>
-                        </m:dPr>
-                        <m:e>
-                          <m:r>
-                            <a:rPr lang="en-US" i="1" dirty="0">
-                              <a:latin typeface="Cambria Math" panose="02040503050406030204" pitchFamily="18" charset="0"/>
-                            </a:rPr>
-                            <m:t>𝑥</m:t>
-                          </m:r>
-                          <m:r>
-                            <a:rPr lang="en-US" i="1" dirty="0">
-                              <a:latin typeface="Cambria Math" panose="02040503050406030204" pitchFamily="18" charset="0"/>
-                            </a:rPr>
-                            <m:t>, </m:t>
-                          </m:r>
-                          <m:sSup>
-                            <m:sSupPr>
-                              <m:ctrlPr>
-                                <a:rPr lang="en-US" i="1" dirty="0">
-                                  <a:latin typeface="Cambria Math" panose="02040503050406030204" pitchFamily="18" charset="0"/>
-                                </a:rPr>
-                              </m:ctrlPr>
-                            </m:sSupPr>
-                            <m:e>
-                              <m:r>
-                                <a:rPr lang="en-US" i="1" dirty="0">
-                                  <a:latin typeface="Cambria Math" panose="02040503050406030204" pitchFamily="18" charset="0"/>
-                                </a:rPr>
-                                <m:t>𝜔</m:t>
-                              </m:r>
-                            </m:e>
-                            <m:sup>
-                              <m:r>
-                                <a:rPr lang="en-US" i="1" dirty="0">
-                                  <a:latin typeface="Cambria Math" panose="02040503050406030204" pitchFamily="18" charset="0"/>
-                                </a:rPr>
-                                <m:t>∗</m:t>
-                              </m:r>
-                            </m:sup>
-                          </m:sSup>
-                        </m:e>
-                      </m:d>
-                      <m:r>
-                        <a:rPr lang="en-US" i="1">
-                          <a:latin typeface="Cambria Math" panose="02040503050406030204" pitchFamily="18" charset="0"/>
-                        </a:rPr>
-                        <m:t>=</m:t>
-                      </m:r>
-                      <m:r>
-                        <a:rPr lang="en-US" i="1" smtClean="0">
-                          <a:solidFill>
-                            <a:schemeClr val="tx1"/>
-                          </a:solidFill>
-                          <a:latin typeface="Cambria Math" panose="02040503050406030204" pitchFamily="18" charset="0"/>
-                        </a:rPr>
-                        <m:t>𝑝</m:t>
-                      </m:r>
-                      <m:d>
-                        <m:dPr>
-                          <m:ctrlPr>
-                            <a:rPr lang="en-US" i="1">
-                              <a:solidFill>
-                                <a:schemeClr val="tx1"/>
-                              </a:solidFill>
-                              <a:latin typeface="Cambria Math" panose="02040503050406030204" pitchFamily="18" charset="0"/>
-                            </a:rPr>
-                          </m:ctrlPr>
-                        </m:dPr>
-                        <m:e>
-                          <m:r>
-                            <a:rPr lang="en-US" b="0" i="1" smtClean="0">
-                              <a:solidFill>
-                                <a:schemeClr val="tx1"/>
-                              </a:solidFill>
-                              <a:latin typeface="Cambria Math" panose="02040503050406030204" pitchFamily="18" charset="0"/>
-                            </a:rPr>
-                            <m:t>1</m:t>
-                          </m:r>
-                        </m:e>
-                        <m:e>
-                          <m:r>
-                            <a:rPr lang="en-US" i="1">
-                              <a:solidFill>
-                                <a:schemeClr val="tx1"/>
-                              </a:solidFill>
-                              <a:latin typeface="Cambria Math" panose="02040503050406030204" pitchFamily="18" charset="0"/>
-                            </a:rPr>
-                            <m:t>𝑥</m:t>
-                          </m:r>
-                        </m:e>
-                      </m:d>
-                    </m:oMath>
-                  </m:oMathPara>
+                  <m:oMath xmlns:m="http://schemas.openxmlformats.org/officeDocument/2006/math">
+                    <m:r>
+                      <a:rPr lang="en-US" i="1" dirty="0">
+                        <a:latin typeface="Cambria Math" panose="02040503050406030204" pitchFamily="18" charset="0"/>
+                      </a:rPr>
+                      <m:t>𝑓</m:t>
+                    </m:r>
+                    <m:d>
+                      <m:dPr>
+                        <m:ctrlPr>
+                          <a:rPr lang="en-US" i="1" dirty="0">
+                            <a:latin typeface="Cambria Math" panose="02040503050406030204" pitchFamily="18" charset="0"/>
+                          </a:rPr>
+                        </m:ctrlPr>
+                      </m:dPr>
+                      <m:e>
+                        <m:r>
+                          <a:rPr lang="en-US" i="1" dirty="0">
+                            <a:latin typeface="Cambria Math" panose="02040503050406030204" pitchFamily="18" charset="0"/>
+                          </a:rPr>
+                          <m:t>𝑥</m:t>
+                        </m:r>
+                        <m:r>
+                          <a:rPr lang="en-US" i="1" dirty="0">
+                            <a:latin typeface="Cambria Math" panose="02040503050406030204" pitchFamily="18" charset="0"/>
+                          </a:rPr>
+                          <m:t>, </m:t>
+                        </m:r>
+                        <m:sSup>
+                          <m:sSupPr>
+                            <m:ctrlPr>
+                              <a:rPr lang="en-US" i="1" dirty="0">
+                                <a:latin typeface="Cambria Math" panose="02040503050406030204" pitchFamily="18" charset="0"/>
+                              </a:rPr>
+                            </m:ctrlPr>
+                          </m:sSupPr>
+                          <m:e>
+                            <m:r>
+                              <a:rPr lang="en-US" i="1" dirty="0">
+                                <a:latin typeface="Cambria Math" panose="02040503050406030204" pitchFamily="18" charset="0"/>
+                              </a:rPr>
+                              <m:t>𝜔</m:t>
+                            </m:r>
+                          </m:e>
+                          <m:sup>
+                            <m:r>
+                              <a:rPr lang="en-US" i="1" dirty="0">
+                                <a:latin typeface="Cambria Math" panose="02040503050406030204" pitchFamily="18" charset="0"/>
+                              </a:rPr>
+                              <m:t>∗</m:t>
+                            </m:r>
+                          </m:sup>
+                        </m:sSup>
+                      </m:e>
+                    </m:d>
+                    <m:r>
+                      <a:rPr lang="en-US" i="1">
+                        <a:latin typeface="Cambria Math" panose="02040503050406030204" pitchFamily="18" charset="0"/>
+                      </a:rPr>
+                      <m:t>=</m:t>
+                    </m:r>
+                    <m:r>
+                      <a:rPr lang="en-US" i="1" smtClean="0">
+                        <a:solidFill>
+                          <a:schemeClr val="tx1"/>
+                        </a:solidFill>
+                        <a:latin typeface="Cambria Math" panose="02040503050406030204" pitchFamily="18" charset="0"/>
+                      </a:rPr>
+                      <m:t>𝑝</m:t>
+                    </m:r>
+                    <m:d>
+                      <m:dPr>
+                        <m:ctrlPr>
+                          <a:rPr lang="en-US" b="0" i="1" smtClean="0">
+                            <a:solidFill>
+                              <a:schemeClr val="tx1"/>
+                            </a:solidFill>
+                            <a:latin typeface="Cambria Math" panose="02040503050406030204" pitchFamily="18" charset="0"/>
+                          </a:rPr>
+                        </m:ctrlPr>
+                      </m:dPr>
+                      <m:e>
+                        <m:r>
+                          <a:rPr lang="en-US" b="0" i="1" smtClean="0">
+                            <a:solidFill>
+                              <a:schemeClr val="tx1"/>
+                            </a:solidFill>
+                            <a:latin typeface="Cambria Math" panose="02040503050406030204" pitchFamily="18" charset="0"/>
+                          </a:rPr>
+                          <m:t>1</m:t>
+                        </m:r>
+                      </m:e>
+                      <m:e>
+                        <m:r>
+                          <a:rPr lang="en-US" i="1">
+                            <a:solidFill>
+                              <a:schemeClr val="tx1"/>
+                            </a:solidFill>
+                            <a:latin typeface="Cambria Math" panose="02040503050406030204" pitchFamily="18" charset="0"/>
+                          </a:rPr>
+                          <m:t>𝑥</m:t>
+                        </m:r>
+                      </m:e>
+                    </m:d>
+                  </m:oMath>
                 </a14:m>
-                <a:br>
-                  <a:rPr lang="en-US" dirty="0"/>
-                </a:br>
-                <a:endParaRPr lang="en-US" dirty="0">
-                  <a:effectLst>
-                    <a:outerShdw blurRad="38100" dist="38100" dir="2700000" algn="tl">
-                      <a:srgbClr val="DDDDDD"/>
-                    </a:outerShdw>
-                  </a:effectLst>
-                </a:endParaRPr>
+                <a:r>
+                  <a:rPr lang="en-US" dirty="0">
+                    <a:effectLst>
+                      <a:outerShdw blurRad="38100" dist="38100" dir="2700000" algn="tl">
+                        <a:srgbClr val="DDDDDD"/>
+                      </a:outerShdw>
+                    </a:effectLst>
+                  </a:rPr>
+                  <a:t>,</a:t>
+                </a:r>
               </a:p>
               <a:p>
                 <a:pPr>
@@ -21783,7 +21513,7 @@
             </p:txBody>
           </p:sp>
         </mc:Choice>
-        <mc:Fallback xmlns="">
+        <mc:Fallback>
           <p:sp>
             <p:nvSpPr>
               <p:cNvPr id="4" name="Content Placeholder 3">

--- a/Lectures/01.Foundations/Lecture03.pptx
+++ b/Lectures/01.Foundations/Lecture03.pptx
@@ -31,13 +31,13 @@
     <p:sldId id="1053" r:id="rId19"/>
     <p:sldId id="1047" r:id="rId20"/>
     <p:sldId id="1033" r:id="rId21"/>
-    <p:sldId id="1048" r:id="rId22"/>
-    <p:sldId id="1018" r:id="rId23"/>
-    <p:sldId id="1050" r:id="rId24"/>
-    <p:sldId id="1051" r:id="rId25"/>
-    <p:sldId id="1052" r:id="rId26"/>
-    <p:sldId id="1056" r:id="rId27"/>
-    <p:sldId id="1042" r:id="rId28"/>
+    <p:sldId id="1042" r:id="rId22"/>
+    <p:sldId id="1048" r:id="rId23"/>
+    <p:sldId id="1018" r:id="rId24"/>
+    <p:sldId id="1050" r:id="rId25"/>
+    <p:sldId id="1051" r:id="rId26"/>
+    <p:sldId id="1052" r:id="rId27"/>
+    <p:sldId id="1056" r:id="rId28"/>
   </p:sldIdLst>
   <p:sldSz cx="9144000" cy="6858000" type="letter"/>
   <p:notesSz cx="9601200" cy="7315200"/>
@@ -4735,8 +4735,8 @@
           <a:chExt cx="0" cy="0"/>
         </a:xfrm>
       </p:grpSpPr>
-      <mc:AlternateContent xmlns:mc="http://schemas.openxmlformats.org/markup-compatibility/2006" xmlns:a14="http://schemas.microsoft.com/office/drawing/2010/main">
-        <mc:Choice Requires="a14">
+      <mc:AlternateContent xmlns:mc="http://schemas.openxmlformats.org/markup-compatibility/2006">
+        <mc:Choice xmlns:a14="http://schemas.microsoft.com/office/drawing/2010/main" Requires="a14">
           <p:sp>
             <p:nvSpPr>
               <p:cNvPr id="4" name="Content Placeholder 3">
@@ -4911,74 +4911,6 @@
                   <a:rPr lang="en-US" dirty="0"/>
                   <a:t>? </a:t>
                 </a:r>
-              </a:p>
-              <a:p>
-                <a:pPr marL="0" indent="0">
-                  <a:buNone/>
-                </a:pPr>
-                <a:endParaRPr lang="en-US" dirty="0"/>
-              </a:p>
-              <a:p>
-                <a:pPr marL="0" indent="0">
-                  <a:buNone/>
-                </a:pPr>
-                <a:r>
-                  <a:rPr lang="en-US" dirty="0"/>
-                  <a:t>However, as shown on the next slide, </a:t>
-                </a:r>
-                <a14:m>
-                  <m:oMath xmlns:m="http://schemas.openxmlformats.org/officeDocument/2006/math">
-                    <m:r>
-                      <a:rPr lang="en-US" b="0" i="1" smtClean="0">
-                        <a:solidFill>
-                          <a:srgbClr val="0033CC"/>
-                        </a:solidFill>
-                        <a:latin typeface="Cambria Math" panose="02040503050406030204" pitchFamily="18" charset="0"/>
-                      </a:rPr>
-                      <m:t>𝑝</m:t>
-                    </m:r>
-                    <m:r>
-                      <a:rPr lang="en-US" b="0" i="1" smtClean="0">
-                        <a:solidFill>
-                          <a:srgbClr val="0033CC"/>
-                        </a:solidFill>
-                        <a:latin typeface="Cambria Math" panose="02040503050406030204" pitchFamily="18" charset="0"/>
-                      </a:rPr>
-                      <m:t>(1|</m:t>
-                    </m:r>
-                    <m:r>
-                      <a:rPr lang="en-US" b="0" i="1" smtClean="0">
-                        <a:solidFill>
-                          <a:srgbClr val="0033CC"/>
-                        </a:solidFill>
-                        <a:latin typeface="Cambria Math" panose="02040503050406030204" pitchFamily="18" charset="0"/>
-                      </a:rPr>
-                      <m:t>𝑥</m:t>
-                    </m:r>
-                    <m:r>
-                      <a:rPr lang="en-US" b="0" i="1" smtClean="0">
-                        <a:solidFill>
-                          <a:srgbClr val="0033CC"/>
-                        </a:solidFill>
-                        <a:latin typeface="Cambria Math" panose="02040503050406030204" pitchFamily="18" charset="0"/>
-                      </a:rPr>
-                      <m:t>)</m:t>
-                    </m:r>
-                  </m:oMath>
-                </a14:m>
-                <a:r>
-                  <a:rPr lang="en-US" dirty="0">
-                    <a:solidFill>
-                      <a:srgbClr val="0033CC"/>
-                    </a:solidFill>
-                    <a:effectLst>
-                      <a:outerShdw blurRad="38100" dist="38100" dir="2700000" algn="tl">
-                        <a:srgbClr val="DDDDDD"/>
-                      </a:outerShdw>
-                    </a:effectLst>
-                  </a:rPr>
-                  <a:t> </a:t>
-                </a:r>
                 <a:r>
                   <a:rPr lang="en-US" dirty="0">
                     <a:effectLst>
@@ -4987,7 +4919,7 @@
                       </a:outerShdw>
                     </a:effectLst>
                   </a:rPr>
-                  <a:t>can be computed from a model trained with a balanced dataset.</a:t>
+                  <a:t>.</a:t>
                 </a:r>
                 <a:br>
                   <a:rPr lang="en-US" dirty="0">
@@ -5003,7 +4935,7 @@
             </p:txBody>
           </p:sp>
         </mc:Choice>
-        <mc:Fallback xmlns="">
+        <mc:Fallback>
           <p:sp>
             <p:nvSpPr>
               <p:cNvPr id="4" name="Content Placeholder 3">
@@ -5112,8 +5044,8 @@
           <a:chExt cx="0" cy="0"/>
         </a:xfrm>
       </p:grpSpPr>
-      <mc:AlternateContent xmlns:mc="http://schemas.openxmlformats.org/markup-compatibility/2006" xmlns:a14="http://schemas.microsoft.com/office/drawing/2010/main">
-        <mc:Choice Requires="a14">
+      <mc:AlternateContent xmlns:mc="http://schemas.openxmlformats.org/markup-compatibility/2006">
+        <mc:Choice xmlns:a14="http://schemas.microsoft.com/office/drawing/2010/main" Requires="a14">
           <p:sp>
             <p:nvSpPr>
               <p:cNvPr id="4" name="Content Placeholder 3">
@@ -5768,13 +5700,100 @@
                 </a:pPr>
                 <a:r>
                   <a:rPr lang="en-US" dirty="0"/>
-                  <a:t>So, it is not necessary to use the true priors during training.</a:t>
+                  <a:t>This shows that, </a:t>
+                </a:r>
+                <a14:m>
+                  <m:oMath xmlns:m="http://schemas.openxmlformats.org/officeDocument/2006/math">
+                    <m:r>
+                      <a:rPr lang="en-US" i="1">
+                        <a:solidFill>
+                          <a:srgbClr val="0033CC"/>
+                        </a:solidFill>
+                        <a:latin typeface="Cambria Math" panose="02040503050406030204" pitchFamily="18" charset="0"/>
+                      </a:rPr>
+                      <m:t>𝑝</m:t>
+                    </m:r>
+                    <m:r>
+                      <a:rPr lang="en-US" i="1">
+                        <a:solidFill>
+                          <a:srgbClr val="0033CC"/>
+                        </a:solidFill>
+                        <a:latin typeface="Cambria Math" panose="02040503050406030204" pitchFamily="18" charset="0"/>
+                      </a:rPr>
+                      <m:t>(1|</m:t>
+                    </m:r>
+                    <m:r>
+                      <a:rPr lang="en-US" i="1">
+                        <a:solidFill>
+                          <a:srgbClr val="0033CC"/>
+                        </a:solidFill>
+                        <a:latin typeface="Cambria Math" panose="02040503050406030204" pitchFamily="18" charset="0"/>
+                      </a:rPr>
+                      <m:t>𝑥</m:t>
+                    </m:r>
+                    <m:r>
+                      <a:rPr lang="en-US" i="1">
+                        <a:solidFill>
+                          <a:srgbClr val="0033CC"/>
+                        </a:solidFill>
+                        <a:latin typeface="Cambria Math" panose="02040503050406030204" pitchFamily="18" charset="0"/>
+                      </a:rPr>
+                      <m:t>)</m:t>
+                    </m:r>
+                  </m:oMath>
+                </a14:m>
+                <a:r>
+                  <a:rPr lang="en-US" dirty="0">
+                    <a:solidFill>
+                      <a:srgbClr val="0033CC"/>
+                    </a:solidFill>
+                    <a:effectLst>
+                      <a:outerShdw blurRad="38100" dist="38100" dir="2700000" algn="tl">
+                        <a:srgbClr val="DDDDDD"/>
+                      </a:outerShdw>
+                    </a:effectLst>
+                  </a:rPr>
+                  <a:t> </a:t>
+                </a:r>
+                <a:r>
+                  <a:rPr lang="en-US" dirty="0">
+                    <a:effectLst>
+                      <a:outerShdw blurRad="38100" dist="38100" dir="2700000" algn="tl">
+                        <a:srgbClr val="DDDDDD"/>
+                      </a:outerShdw>
+                    </a:effectLst>
+                  </a:rPr>
+                  <a:t>can be computed from a model trained with a </a:t>
+                </a:r>
+                <a:r>
+                  <a:rPr lang="en-US" i="1" dirty="0">
+                    <a:effectLst>
+                      <a:outerShdw blurRad="38100" dist="38100" dir="2700000" algn="tl">
+                        <a:srgbClr val="DDDDDD"/>
+                      </a:outerShdw>
+                    </a:effectLst>
+                  </a:rPr>
+                  <a:t>balanced</a:t>
+                </a:r>
+                <a:r>
+                  <a:rPr lang="en-US" dirty="0">
+                    <a:effectLst>
+                      <a:outerShdw blurRad="38100" dist="38100" dir="2700000" algn="tl">
+                        <a:srgbClr val="DDDDDD"/>
+                      </a:outerShdw>
+                    </a:effectLst>
+                  </a:rPr>
+                  <a:t> dataset</a:t>
+                </a:r>
+                <a:r>
+                  <a:rPr lang="en-US" dirty="0"/>
+                  <a:t>.</a:t>
                 </a:r>
               </a:p>
             </p:txBody>
           </p:sp>
         </mc:Choice>
-        <mc:Fallback xmlns="">
+        <mc:Fallback>
           <p:sp>
             <p:nvSpPr>
               <p:cNvPr id="4" name="Content Placeholder 3">
@@ -6135,8 +6154,8 @@
           </a:p>
         </p:txBody>
       </p:sp>
-      <mc:AlternateContent xmlns:mc="http://schemas.openxmlformats.org/markup-compatibility/2006" xmlns:a14="http://schemas.microsoft.com/office/drawing/2010/main">
-        <mc:Choice Requires="a14">
+      <mc:AlternateContent xmlns:mc="http://schemas.openxmlformats.org/markup-compatibility/2006">
+        <mc:Choice xmlns:a14="http://schemas.microsoft.com/office/drawing/2010/main" Requires="a14">
           <p:sp>
             <p:nvSpPr>
               <p:cNvPr id="8" name="Content Placeholder 7">
@@ -6323,7 +6342,7 @@
                 </a14:m>
                 <a:r>
                   <a:rPr lang="en-US" dirty="0"/>
-                  <a:t> to the “positive” (signal) class and below which one assigns it to the “negative” (background) class. </a:t>
+                  <a:t> to the “positive” class and below which one assigns it to the “negative” class. </a:t>
                 </a:r>
                 <a:br>
                   <a:rPr lang="en-US" dirty="0"/>
@@ -6896,7 +6915,7 @@
                         <m:ctrlPr>
                           <a:rPr lang="en-US" b="1" i="1" smtClean="0">
                             <a:solidFill>
-                              <a:srgbClr val="C00000"/>
+                              <a:schemeClr val="tx1"/>
                             </a:solidFill>
                             <a:latin typeface="Cambria Math" panose="02040503050406030204" pitchFamily="18" charset="0"/>
                           </a:rPr>
@@ -7158,7 +7177,7 @@
             </p:txBody>
           </p:sp>
         </mc:Choice>
-        <mc:Fallback xmlns="">
+        <mc:Fallback>
           <p:sp>
             <p:nvSpPr>
               <p:cNvPr id="8" name="Content Placeholder 7">
@@ -7179,7 +7198,7 @@
               <a:blipFill>
                 <a:blip r:embed="rId2"/>
                 <a:stretch>
-                  <a:fillRect l="-1305" t="-1316" r="-1631" b="-7895"/>
+                  <a:fillRect l="-1305" t="-1316" b="-7895"/>
                 </a:stretch>
               </a:blipFill>
             </p:spPr>
@@ -9060,7 +9079,7 @@
                         <m:chr m:val="∑"/>
                         <m:supHide m:val="on"/>
                         <m:ctrlPr>
-                          <a:rPr lang="en-US" i="1">
+                          <a:rPr lang="en-US" b="0" i="1" smtClean="0">
                             <a:latin typeface="Cambria Math" panose="02040503050406030204" pitchFamily="18" charset="0"/>
                           </a:rPr>
                         </m:ctrlPr>
@@ -9221,7 +9240,7 @@
                         <m:chr m:val="∑"/>
                         <m:supHide m:val="on"/>
                         <m:ctrlPr>
-                          <a:rPr lang="en-US" i="1">
+                          <a:rPr lang="en-US" b="0" i="1" smtClean="0">
                             <a:latin typeface="Cambria Math" panose="02040503050406030204" pitchFamily="18" charset="0"/>
                           </a:rPr>
                         </m:ctrlPr>
@@ -10821,8 +10840,8 @@
           </a:p>
         </p:txBody>
       </p:sp>
-      <mc:AlternateContent xmlns:mc="http://schemas.openxmlformats.org/markup-compatibility/2006">
-        <mc:Choice xmlns:a14="http://schemas.microsoft.com/office/drawing/2010/main" Requires="a14">
+      <mc:AlternateContent xmlns:mc="http://schemas.openxmlformats.org/markup-compatibility/2006" xmlns:a14="http://schemas.microsoft.com/office/drawing/2010/main">
+        <mc:Choice Requires="a14">
           <p:sp>
             <p:nvSpPr>
               <p:cNvPr id="8" name="Content Placeholder 7">
@@ -11383,7 +11402,7 @@
             </p:txBody>
           </p:sp>
         </mc:Choice>
-        <mc:Fallback>
+        <mc:Fallback xmlns="">
           <p:sp>
             <p:nvSpPr>
               <p:cNvPr id="8" name="Content Placeholder 7">
@@ -11490,6 +11509,133 @@
   <p:cSld>
     <p:spTree>
       <p:nvGrpSpPr>
+        <p:cNvPr id="1" name=""/>
+        <p:cNvGrpSpPr/>
+        <p:nvPr/>
+      </p:nvGrpSpPr>
+      <p:grpSpPr>
+        <a:xfrm>
+          <a:off x="0" y="0"/>
+          <a:ext cx="0" cy="0"/>
+          <a:chOff x="0" y="0"/>
+          <a:chExt cx="0" cy="0"/>
+        </a:xfrm>
+      </p:grpSpPr>
+      <p:sp>
+        <p:nvSpPr>
+          <p:cNvPr id="3" name="Content Placeholder 2">
+            <a:extLst>
+              <a:ext uri="{FF2B5EF4-FFF2-40B4-BE49-F238E27FC236}">
+                <a16:creationId xmlns:a16="http://schemas.microsoft.com/office/drawing/2014/main" id="{DCA0730A-77BF-1B8D-5376-F6DCE604B7BB}"/>
+              </a:ext>
+            </a:extLst>
+          </p:cNvPr>
+          <p:cNvSpPr>
+            <a:spLocks noGrp="1"/>
+          </p:cNvSpPr>
+          <p:nvPr>
+            <p:ph sz="half" idx="1"/>
+          </p:nvPr>
+        </p:nvSpPr>
+        <p:spPr/>
+        <p:txBody>
+          <a:bodyPr/>
+          <a:lstStyle/>
+          <a:p>
+            <a:r>
+              <a:rPr lang="en-US" dirty="0"/>
+              <a:t>In addition to the ROC curve and the AUC, the performance of a classifier can be characterized with several other numbers including:</a:t>
+            </a:r>
+          </a:p>
+          <a:p>
+            <a:pPr lvl="1"/>
+            <a:r>
+              <a:rPr lang="en-US" dirty="0"/>
+              <a:t>False Negatives (FN)</a:t>
+            </a:r>
+          </a:p>
+          <a:p>
+            <a:pPr lvl="1"/>
+            <a:r>
+              <a:rPr lang="en-US" dirty="0"/>
+              <a:t>True Positives	(TP)</a:t>
+            </a:r>
+          </a:p>
+          <a:p>
+            <a:pPr lvl="1"/>
+            <a:r>
+              <a:rPr lang="en-US" dirty="0"/>
+              <a:t>True Negatives 	(TN)</a:t>
+            </a:r>
+          </a:p>
+          <a:p>
+            <a:pPr lvl="1"/>
+            <a:r>
+              <a:rPr lang="en-US" dirty="0"/>
+              <a:t>False Positives	(FP)</a:t>
+            </a:r>
+          </a:p>
+          <a:p>
+            <a:pPr marL="457200" lvl="1" indent="0">
+              <a:buNone/>
+            </a:pPr>
+            <a:r>
+              <a:rPr lang="en-US" dirty="0"/>
+              <a:t>which can be represented in a confusion matrix.</a:t>
+            </a:r>
+            <a:br>
+              <a:rPr lang="en-US" dirty="0"/>
+            </a:br>
+            <a:endParaRPr lang="en-US" dirty="0"/>
+          </a:p>
+        </p:txBody>
+      </p:sp>
+      <p:sp>
+        <p:nvSpPr>
+          <p:cNvPr id="2" name="Title 1">
+            <a:extLst>
+              <a:ext uri="{FF2B5EF4-FFF2-40B4-BE49-F238E27FC236}">
+                <a16:creationId xmlns:a16="http://schemas.microsoft.com/office/drawing/2014/main" id="{4B31FE53-CCD3-2FB4-0B9D-BDDBD7ADB3B9}"/>
+              </a:ext>
+            </a:extLst>
+          </p:cNvPr>
+          <p:cNvSpPr>
+            <a:spLocks noGrp="1"/>
+          </p:cNvSpPr>
+          <p:nvPr>
+            <p:ph type="title"/>
+          </p:nvPr>
+        </p:nvSpPr>
+        <p:spPr/>
+        <p:txBody>
+          <a:bodyPr/>
+          <a:lstStyle/>
+          <a:p>
+            <a:r>
+              <a:rPr lang="en-US" dirty="0"/>
+              <a:t>Summary</a:t>
+            </a:r>
+          </a:p>
+        </p:txBody>
+      </p:sp>
+    </p:spTree>
+    <p:extLst>
+      <p:ext uri="{BB962C8B-B14F-4D97-AF65-F5344CB8AC3E}">
+        <p14:creationId xmlns:p14="http://schemas.microsoft.com/office/powerpoint/2010/main" val="1190940371"/>
+      </p:ext>
+    </p:extLst>
+  </p:cSld>
+  <p:clrMapOvr>
+    <a:masterClrMapping/>
+  </p:clrMapOvr>
+</p:sld>
+</file>
+
+<file path=ppt/slides/slide22.xml><?xml version="1.0" encoding="utf-8"?>
+<p:sld xmlns:a="http://schemas.openxmlformats.org/drawingml/2006/main" xmlns:r="http://schemas.openxmlformats.org/officeDocument/2006/relationships" xmlns:p="http://schemas.openxmlformats.org/presentationml/2006/main">
+  <p:cSld>
+    <p:spTree>
+      <p:nvGrpSpPr>
         <p:cNvPr id="1" name="">
           <a:extLst>
             <a:ext uri="{FF2B5EF4-FFF2-40B4-BE49-F238E27FC236}">
@@ -11552,7 +11698,7 @@
 </p:sld>
 </file>
 
-<file path=ppt/slides/slide22.xml><?xml version="1.0" encoding="utf-8"?>
+<file path=ppt/slides/slide23.xml><?xml version="1.0" encoding="utf-8"?>
 <p:sld xmlns:a="http://schemas.openxmlformats.org/drawingml/2006/main" xmlns:r="http://schemas.openxmlformats.org/officeDocument/2006/relationships" xmlns:p="http://schemas.openxmlformats.org/presentationml/2006/main">
   <p:cSld>
     <p:spTree>
@@ -11575,8 +11721,8 @@
           <a:chExt cx="0" cy="0"/>
         </a:xfrm>
       </p:grpSpPr>
-      <mc:AlternateContent xmlns:mc="http://schemas.openxmlformats.org/markup-compatibility/2006">
-        <mc:Choice xmlns:a14="http://schemas.microsoft.com/office/drawing/2010/main" Requires="a14">
+      <mc:AlternateContent xmlns:mc="http://schemas.openxmlformats.org/markup-compatibility/2006" xmlns:a14="http://schemas.microsoft.com/office/drawing/2010/main">
+        <mc:Choice Requires="a14">
           <p:sp>
             <p:nvSpPr>
               <p:cNvPr id="4" name="Content Placeholder 3">
@@ -12199,7 +12345,7 @@
             </p:txBody>
           </p:sp>
         </mc:Choice>
-        <mc:Fallback>
+        <mc:Fallback xmlns="">
           <p:sp>
             <p:nvSpPr>
               <p:cNvPr id="4" name="Content Placeholder 3">
@@ -12285,7 +12431,7 @@
 </p:sld>
 </file>
 
-<file path=ppt/slides/slide23.xml><?xml version="1.0" encoding="utf-8"?>
+<file path=ppt/slides/slide24.xml><?xml version="1.0" encoding="utf-8"?>
 <p:sld xmlns:a="http://schemas.openxmlformats.org/drawingml/2006/main" xmlns:r="http://schemas.openxmlformats.org/officeDocument/2006/relationships" xmlns:p="http://schemas.openxmlformats.org/presentationml/2006/main">
   <p:cSld>
     <p:spTree>
@@ -13515,7 +13661,7 @@
 </p:sld>
 </file>
 
-<file path=ppt/slides/slide24.xml><?xml version="1.0" encoding="utf-8"?>
+<file path=ppt/slides/slide25.xml><?xml version="1.0" encoding="utf-8"?>
 <p:sld xmlns:a="http://schemas.openxmlformats.org/drawingml/2006/main" xmlns:r="http://schemas.openxmlformats.org/officeDocument/2006/relationships" xmlns:p="http://schemas.openxmlformats.org/presentationml/2006/main">
   <p:cSld>
     <p:spTree>
@@ -13571,8 +13717,8 @@
           </a:p>
         </p:txBody>
       </p:sp>
-      <mc:AlternateContent xmlns:mc="http://schemas.openxmlformats.org/markup-compatibility/2006">
-        <mc:Choice xmlns:a14="http://schemas.microsoft.com/office/drawing/2010/main" Requires="a14">
+      <mc:AlternateContent xmlns:mc="http://schemas.openxmlformats.org/markup-compatibility/2006" xmlns:a14="http://schemas.microsoft.com/office/drawing/2010/main">
+        <mc:Choice Requires="a14">
           <p:sp>
             <p:nvSpPr>
               <p:cNvPr id="8" name="Content Placeholder 7">
@@ -14000,7 +14146,7 @@
             </p:txBody>
           </p:sp>
         </mc:Choice>
-        <mc:Fallback>
+        <mc:Fallback xmlns="">
           <p:sp>
             <p:nvSpPr>
               <p:cNvPr id="8" name="Content Placeholder 7">
@@ -14298,7 +14444,7 @@
 </p:sld>
 </file>
 
-<file path=ppt/slides/slide25.xml><?xml version="1.0" encoding="utf-8"?>
+<file path=ppt/slides/slide26.xml><?xml version="1.0" encoding="utf-8"?>
 <p:sld xmlns:a="http://schemas.openxmlformats.org/drawingml/2006/main" xmlns:r="http://schemas.openxmlformats.org/officeDocument/2006/relationships" xmlns:p="http://schemas.openxmlformats.org/presentationml/2006/main">
   <p:cSld>
     <p:spTree>
@@ -15651,7 +15797,7 @@
 </p:sld>
 </file>
 
-<file path=ppt/slides/slide26.xml><?xml version="1.0" encoding="utf-8"?>
+<file path=ppt/slides/slide27.xml><?xml version="1.0" encoding="utf-8"?>
 <p:sld xmlns:a="http://schemas.openxmlformats.org/drawingml/2006/main" xmlns:r="http://schemas.openxmlformats.org/officeDocument/2006/relationships" xmlns:p="http://schemas.openxmlformats.org/presentationml/2006/main">
   <p:cSld>
     <p:spTree>
@@ -15707,8 +15853,8 @@
           </a:p>
         </p:txBody>
       </p:sp>
-      <mc:AlternateContent xmlns:mc="http://schemas.openxmlformats.org/markup-compatibility/2006">
-        <mc:Choice xmlns:a14="http://schemas.microsoft.com/office/drawing/2010/main" Requires="a14">
+      <mc:AlternateContent xmlns:mc="http://schemas.openxmlformats.org/markup-compatibility/2006" xmlns:a14="http://schemas.microsoft.com/office/drawing/2010/main">
+        <mc:Choice Requires="a14">
           <p:sp>
             <p:nvSpPr>
               <p:cNvPr id="8" name="Content Placeholder 7">
@@ -16677,7 +16823,7 @@
             </p:txBody>
           </p:sp>
         </mc:Choice>
-        <mc:Fallback>
+        <mc:Fallback xmlns="">
           <p:sp>
             <p:nvSpPr>
               <p:cNvPr id="8" name="Content Placeholder 7">
@@ -16743,221 +16889,6 @@
       </p:transition>
     </mc:Fallback>
   </mc:AlternateContent>
-</p:sld>
-</file>
-
-<file path=ppt/slides/slide27.xml><?xml version="1.0" encoding="utf-8"?>
-<p:sld xmlns:a="http://schemas.openxmlformats.org/drawingml/2006/main" xmlns:r="http://schemas.openxmlformats.org/officeDocument/2006/relationships" xmlns:p="http://schemas.openxmlformats.org/presentationml/2006/main">
-  <p:cSld>
-    <p:spTree>
-      <p:nvGrpSpPr>
-        <p:cNvPr id="1" name=""/>
-        <p:cNvGrpSpPr/>
-        <p:nvPr/>
-      </p:nvGrpSpPr>
-      <p:grpSpPr>
-        <a:xfrm>
-          <a:off x="0" y="0"/>
-          <a:ext cx="0" cy="0"/>
-          <a:chOff x="0" y="0"/>
-          <a:chExt cx="0" cy="0"/>
-        </a:xfrm>
-      </p:grpSpPr>
-      <p:sp>
-        <p:nvSpPr>
-          <p:cNvPr id="3" name="Content Placeholder 2">
-            <a:extLst>
-              <a:ext uri="{FF2B5EF4-FFF2-40B4-BE49-F238E27FC236}">
-                <a16:creationId xmlns:a16="http://schemas.microsoft.com/office/drawing/2014/main" id="{DCA0730A-77BF-1B8D-5376-F6DCE604B7BB}"/>
-              </a:ext>
-            </a:extLst>
-          </p:cNvPr>
-          <p:cNvSpPr>
-            <a:spLocks noGrp="1"/>
-          </p:cNvSpPr>
-          <p:nvPr>
-            <p:ph sz="half" idx="1"/>
-          </p:nvPr>
-        </p:nvSpPr>
-        <p:spPr/>
-        <p:txBody>
-          <a:bodyPr/>
-          <a:lstStyle/>
-          <a:p>
-            <a:r>
-              <a:rPr lang="en-US" dirty="0"/>
-              <a:t>In addition to the ROC curve and the AUC, the performance of a classifier can be characterized with several other numbers including:</a:t>
-            </a:r>
-          </a:p>
-          <a:p>
-            <a:pPr lvl="1"/>
-            <a:r>
-              <a:rPr lang="en-US" dirty="0"/>
-              <a:t>False Negatives (FN)</a:t>
-            </a:r>
-          </a:p>
-          <a:p>
-            <a:pPr lvl="1"/>
-            <a:r>
-              <a:rPr lang="en-US" dirty="0"/>
-              <a:t>True Positives	(TP)</a:t>
-            </a:r>
-          </a:p>
-          <a:p>
-            <a:pPr lvl="1"/>
-            <a:r>
-              <a:rPr lang="en-US" dirty="0"/>
-              <a:t>True Negatives 	(TN)</a:t>
-            </a:r>
-          </a:p>
-          <a:p>
-            <a:pPr lvl="1"/>
-            <a:r>
-              <a:rPr lang="en-US" dirty="0"/>
-              <a:t>False Positives	(FP)</a:t>
-            </a:r>
-            <a:br>
-              <a:rPr lang="en-US" dirty="0"/>
-            </a:br>
-            <a:endParaRPr lang="en-US" dirty="0"/>
-          </a:p>
-          <a:p>
-            <a:r>
-              <a:rPr lang="en-US" dirty="0"/>
-              <a:t>A classifier can be repurposed in many ways, including as a probability density estimator.</a:t>
-            </a:r>
-          </a:p>
-        </p:txBody>
-      </p:sp>
-      <p:sp>
-        <p:nvSpPr>
-          <p:cNvPr id="2" name="Title 1">
-            <a:extLst>
-              <a:ext uri="{FF2B5EF4-FFF2-40B4-BE49-F238E27FC236}">
-                <a16:creationId xmlns:a16="http://schemas.microsoft.com/office/drawing/2014/main" id="{4B31FE53-CCD3-2FB4-0B9D-BDDBD7ADB3B9}"/>
-              </a:ext>
-            </a:extLst>
-          </p:cNvPr>
-          <p:cNvSpPr>
-            <a:spLocks noGrp="1"/>
-          </p:cNvSpPr>
-          <p:nvPr>
-            <p:ph type="title"/>
-          </p:nvPr>
-        </p:nvSpPr>
-        <p:spPr/>
-        <p:txBody>
-          <a:bodyPr/>
-          <a:lstStyle/>
-          <a:p>
-            <a:r>
-              <a:rPr lang="en-US" dirty="0"/>
-              <a:t>Summary</a:t>
-            </a:r>
-          </a:p>
-        </p:txBody>
-      </p:sp>
-    </p:spTree>
-    <p:extLst>
-      <p:ext uri="{BB962C8B-B14F-4D97-AF65-F5344CB8AC3E}">
-        <p14:creationId xmlns:p14="http://schemas.microsoft.com/office/powerpoint/2010/main" val="1190940371"/>
-      </p:ext>
-    </p:extLst>
-  </p:cSld>
-  <p:clrMapOvr>
-    <a:masterClrMapping/>
-  </p:clrMapOvr>
-  <p:timing>
-    <p:tnLst>
-      <p:par>
-        <p:cTn id="1" dur="indefinite" restart="never" nodeType="tmRoot">
-          <p:childTnLst>
-            <p:seq concurrent="1" nextAc="seek">
-              <p:cTn id="2" dur="indefinite" nodeType="mainSeq">
-                <p:childTnLst>
-                  <p:par>
-                    <p:cTn id="3" fill="hold">
-                      <p:stCondLst>
-                        <p:cond delay="indefinite"/>
-                      </p:stCondLst>
-                      <p:childTnLst>
-                        <p:par>
-                          <p:cTn id="4" fill="hold">
-                            <p:stCondLst>
-                              <p:cond delay="0"/>
-                            </p:stCondLst>
-                            <p:childTnLst>
-                              <p:par>
-                                <p:cTn id="5" presetID="10" presetClass="entr" presetSubtype="0" fill="hold" nodeType="clickEffect">
-                                  <p:stCondLst>
-                                    <p:cond delay="0"/>
-                                  </p:stCondLst>
-                                  <p:childTnLst>
-                                    <p:set>
-                                      <p:cBhvr>
-                                        <p:cTn id="6" dur="1" fill="hold">
-                                          <p:stCondLst>
-                                            <p:cond delay="0"/>
-                                          </p:stCondLst>
-                                        </p:cTn>
-                                        <p:tgtEl>
-                                          <p:spTgt spid="3">
-                                            <p:txEl>
-                                              <p:pRg st="5" end="5"/>
-                                            </p:txEl>
-                                          </p:spTgt>
-                                        </p:tgtEl>
-                                        <p:attrNameLst>
-                                          <p:attrName>style.visibility</p:attrName>
-                                        </p:attrNameLst>
-                                      </p:cBhvr>
-                                      <p:to>
-                                        <p:strVal val="visible"/>
-                                      </p:to>
-                                    </p:set>
-                                    <p:animEffect transition="in" filter="fade">
-                                      <p:cBhvr>
-                                        <p:cTn id="7" dur="500"/>
-                                        <p:tgtEl>
-                                          <p:spTgt spid="3">
-                                            <p:txEl>
-                                              <p:pRg st="5" end="5"/>
-                                            </p:txEl>
-                                          </p:spTgt>
-                                        </p:tgtEl>
-                                      </p:cBhvr>
-                                    </p:animEffect>
-                                  </p:childTnLst>
-                                </p:cTn>
-                              </p:par>
-                            </p:childTnLst>
-                          </p:cTn>
-                        </p:par>
-                      </p:childTnLst>
-                    </p:cTn>
-                  </p:par>
-                </p:childTnLst>
-              </p:cTn>
-              <p:prevCondLst>
-                <p:cond evt="onPrev" delay="0">
-                  <p:tgtEl>
-                    <p:sldTgt/>
-                  </p:tgtEl>
-                </p:cond>
-              </p:prevCondLst>
-              <p:nextCondLst>
-                <p:cond evt="onNext" delay="0">
-                  <p:tgtEl>
-                    <p:sldTgt/>
-                  </p:tgtEl>
-                </p:cond>
-              </p:nextCondLst>
-            </p:seq>
-          </p:childTnLst>
-        </p:cTn>
-      </p:par>
-    </p:tnLst>
-  </p:timing>
 </p:sld>
 </file>
 
@@ -20737,8 +20668,8 @@
           <a:chExt cx="0" cy="0"/>
         </a:xfrm>
       </p:grpSpPr>
-      <mc:AlternateContent xmlns:mc="http://schemas.openxmlformats.org/markup-compatibility/2006">
-        <mc:Choice xmlns:a14="http://schemas.microsoft.com/office/drawing/2010/main" Requires="a14">
+      <mc:AlternateContent xmlns:mc="http://schemas.openxmlformats.org/markup-compatibility/2006" xmlns:a14="http://schemas.microsoft.com/office/drawing/2010/main">
+        <mc:Choice Requires="a14">
           <p:sp>
             <p:nvSpPr>
               <p:cNvPr id="4" name="Content Placeholder 3">
@@ -21513,7 +21444,7 @@
             </p:txBody>
           </p:sp>
         </mc:Choice>
-        <mc:Fallback>
+        <mc:Fallback xmlns="">
           <p:sp>
             <p:nvSpPr>
               <p:cNvPr id="4" name="Content Placeholder 3">
